--- a/statistics_07_hypothesis_testing_p_val.pptx
+++ b/statistics_07_hypothesis_testing_p_val.pptx
@@ -5,25 +5,26 @@
     <p:sldMasterId id="2147483659" r:id="rId1"/>
   </p:sldMasterIdLst>
   <p:notesMasterIdLst>
-    <p:notesMasterId r:id="rId18"/>
+    <p:notesMasterId r:id="rId19"/>
   </p:notesMasterIdLst>
   <p:sldIdLst>
     <p:sldId id="316" r:id="rId2"/>
-    <p:sldId id="258" r:id="rId3"/>
-    <p:sldId id="323" r:id="rId4"/>
-    <p:sldId id="320" r:id="rId5"/>
-    <p:sldId id="354" r:id="rId6"/>
-    <p:sldId id="319" r:id="rId7"/>
-    <p:sldId id="317" r:id="rId8"/>
-    <p:sldId id="318" r:id="rId9"/>
-    <p:sldId id="314" r:id="rId10"/>
-    <p:sldId id="321" r:id="rId11"/>
-    <p:sldId id="313" r:id="rId12"/>
-    <p:sldId id="294" r:id="rId13"/>
-    <p:sldId id="346" r:id="rId14"/>
-    <p:sldId id="256" r:id="rId15"/>
-    <p:sldId id="352" r:id="rId16"/>
-    <p:sldId id="353" r:id="rId17"/>
+    <p:sldId id="383" r:id="rId3"/>
+    <p:sldId id="258" r:id="rId4"/>
+    <p:sldId id="323" r:id="rId5"/>
+    <p:sldId id="320" r:id="rId6"/>
+    <p:sldId id="354" r:id="rId7"/>
+    <p:sldId id="319" r:id="rId8"/>
+    <p:sldId id="317" r:id="rId9"/>
+    <p:sldId id="318" r:id="rId10"/>
+    <p:sldId id="314" r:id="rId11"/>
+    <p:sldId id="321" r:id="rId12"/>
+    <p:sldId id="313" r:id="rId13"/>
+    <p:sldId id="294" r:id="rId14"/>
+    <p:sldId id="346" r:id="rId15"/>
+    <p:sldId id="256" r:id="rId16"/>
+    <p:sldId id="352" r:id="rId17"/>
+    <p:sldId id="353" r:id="rId18"/>
   </p:sldIdLst>
   <p:sldSz cx="12192000" cy="6858000"/>
   <p:notesSz cx="6858000" cy="9144000"/>
@@ -15429,6 +15430,954 @@
         </p:nvSpPr>
         <p:spPr>
           <a:xfrm>
+            <a:off x="122583" y="129208"/>
+            <a:ext cx="6172200" cy="5179771"/>
+          </a:xfrm>
+          <a:prstGeom prst="rect">
+            <a:avLst/>
+          </a:prstGeom>
+          <a:noFill/>
+          <a:ln>
+            <a:noFill/>
+          </a:ln>
+        </p:spPr>
+        <p:txBody>
+          <a:bodyPr spcFirstLastPara="1" wrap="square" lIns="91425" tIns="91425" rIns="91425" bIns="91425" anchor="t" anchorCtr="0">
+            <a:noAutofit/>
+          </a:bodyPr>
+          <a:lstStyle/>
+          <a:p>
+            <a:r>
+              <a:rPr lang="en-US" sz="2800" b="1" dirty="0">
+                <a:latin typeface="Calibri"/>
+                <a:ea typeface="Calibri"/>
+                <a:cs typeface="Calibri"/>
+                <a:sym typeface="Calibri"/>
+              </a:rPr>
+              <a:t>Checking whether a coin is fair - </a:t>
+            </a:r>
+            <a:r>
+              <a:rPr lang="en-US" sz="2800" b="1" i="1" dirty="0">
+                <a:solidFill>
+                  <a:srgbClr val="222222"/>
+                </a:solidFill>
+                <a:highlight>
+                  <a:srgbClr val="FFFFFF"/>
+                </a:highlight>
+                <a:latin typeface="Times New Roman"/>
+                <a:ea typeface="Times New Roman"/>
+                <a:cs typeface="Times New Roman"/>
+                <a:sym typeface="Times New Roman"/>
+              </a:rPr>
+              <a:t>χ</a:t>
+            </a:r>
+            <a:r>
+              <a:rPr lang="en-US" sz="2800" b="1" baseline="30000" dirty="0">
+                <a:solidFill>
+                  <a:srgbClr val="222222"/>
+                </a:solidFill>
+                <a:highlight>
+                  <a:srgbClr val="FFFFFF"/>
+                </a:highlight>
+                <a:latin typeface="Times New Roman"/>
+                <a:ea typeface="Times New Roman"/>
+                <a:cs typeface="Times New Roman"/>
+                <a:sym typeface="Times New Roman"/>
+              </a:rPr>
+              <a:t>2</a:t>
+            </a:r>
+            <a:r>
+              <a:rPr lang="en-US" sz="2800" b="1" dirty="0">
+                <a:latin typeface="Calibri"/>
+                <a:ea typeface="Calibri"/>
+                <a:cs typeface="Calibri"/>
+                <a:sym typeface="Calibri"/>
+              </a:rPr>
+              <a:t> test</a:t>
+            </a:r>
+            <a:br>
+              <a:rPr lang="en-US" sz="1800" dirty="0">
+                <a:latin typeface="Calibri"/>
+                <a:ea typeface="Calibri"/>
+                <a:cs typeface="Calibri"/>
+                <a:sym typeface="Calibri"/>
+              </a:rPr>
+            </a:br>
+            <a:br>
+              <a:rPr lang="en-US" sz="1300" dirty="0">
+                <a:latin typeface="Calibri"/>
+                <a:ea typeface="Calibri"/>
+                <a:cs typeface="Calibri"/>
+                <a:sym typeface="Calibri"/>
+              </a:rPr>
+            </a:br>
+            <a:r>
+              <a:rPr lang="en-US" sz="1300" b="1" u="sng" dirty="0">
+                <a:latin typeface="Calibri"/>
+                <a:ea typeface="Calibri"/>
+                <a:cs typeface="Calibri"/>
+                <a:sym typeface="Calibri"/>
+              </a:rPr>
+              <a:t>Problem:</a:t>
+            </a:r>
+            <a:endParaRPr sz="1300" b="1" u="sng" dirty="0">
+              <a:latin typeface="Calibri"/>
+              <a:ea typeface="Calibri"/>
+              <a:cs typeface="Calibri"/>
+              <a:sym typeface="Calibri"/>
+            </a:endParaRPr>
+          </a:p>
+          <a:p>
+            <a:pPr marL="0" lvl="0" indent="0" algn="l" rtl="0">
+              <a:spcBef>
+                <a:spcPts val="0"/>
+              </a:spcBef>
+              <a:spcAft>
+                <a:spcPts val="0"/>
+              </a:spcAft>
+              <a:buNone/>
+            </a:pPr>
+            <a:r>
+              <a:rPr lang="en-US" sz="1300" dirty="0">
+                <a:latin typeface="Calibri"/>
+                <a:ea typeface="Calibri"/>
+                <a:cs typeface="Calibri"/>
+                <a:sym typeface="Calibri"/>
+              </a:rPr>
+              <a:t>We want to test a null hypothesis that the coin is fair.</a:t>
+            </a:r>
+          </a:p>
+          <a:p>
+            <a:pPr marL="0" lvl="0" indent="0" algn="l" rtl="0">
+              <a:spcBef>
+                <a:spcPts val="0"/>
+              </a:spcBef>
+              <a:spcAft>
+                <a:spcPts val="0"/>
+              </a:spcAft>
+              <a:buNone/>
+            </a:pPr>
+            <a:r>
+              <a:rPr lang="en-US" sz="1300" dirty="0">
+                <a:latin typeface="Calibri"/>
+                <a:ea typeface="Calibri"/>
+                <a:cs typeface="Calibri"/>
+                <a:sym typeface="Calibri"/>
+              </a:rPr>
+              <a:t>We flip the coin N times and got H heads.</a:t>
+            </a:r>
+          </a:p>
+          <a:p>
+            <a:pPr marL="0" lvl="0" indent="0" algn="l" rtl="0">
+              <a:spcBef>
+                <a:spcPts val="0"/>
+              </a:spcBef>
+              <a:spcAft>
+                <a:spcPts val="0"/>
+              </a:spcAft>
+              <a:buNone/>
+            </a:pPr>
+            <a:r>
+              <a:rPr lang="en-US" sz="1300" dirty="0">
+                <a:latin typeface="Calibri"/>
+                <a:ea typeface="Calibri"/>
+                <a:cs typeface="Calibri"/>
+                <a:sym typeface="Calibri"/>
+              </a:rPr>
+              <a:t>So number of observed tails T = N-H.</a:t>
+            </a:r>
+          </a:p>
+          <a:p>
+            <a:pPr marL="0" lvl="0" indent="0" algn="l" rtl="0">
+              <a:spcBef>
+                <a:spcPts val="0"/>
+              </a:spcBef>
+              <a:spcAft>
+                <a:spcPts val="0"/>
+              </a:spcAft>
+              <a:buNone/>
+            </a:pPr>
+            <a:endParaRPr lang="en-US" sz="1300" dirty="0">
+              <a:latin typeface="Calibri"/>
+              <a:ea typeface="Calibri"/>
+              <a:cs typeface="Calibri"/>
+              <a:sym typeface="Calibri"/>
+            </a:endParaRPr>
+          </a:p>
+          <a:p>
+            <a:pPr marL="0" lvl="0" indent="0" algn="l" rtl="0">
+              <a:spcBef>
+                <a:spcPts val="0"/>
+              </a:spcBef>
+              <a:spcAft>
+                <a:spcPts val="0"/>
+              </a:spcAft>
+              <a:buNone/>
+            </a:pPr>
+            <a:r>
+              <a:rPr lang="en-US" sz="1300" dirty="0">
+                <a:latin typeface="Calibri"/>
+                <a:ea typeface="Calibri"/>
+                <a:cs typeface="Calibri"/>
+                <a:sym typeface="Calibri"/>
+              </a:rPr>
+              <a:t>Expected values are N/2 for heads and for tails.</a:t>
+            </a:r>
+          </a:p>
+          <a:p>
+            <a:pPr marL="0" lvl="0" indent="0" algn="l" rtl="0">
+              <a:spcBef>
+                <a:spcPts val="0"/>
+              </a:spcBef>
+              <a:spcAft>
+                <a:spcPts val="0"/>
+              </a:spcAft>
+              <a:buNone/>
+            </a:pPr>
+            <a:endParaRPr lang="en-US" sz="1300" dirty="0">
+              <a:latin typeface="Calibri"/>
+              <a:ea typeface="Calibri"/>
+              <a:cs typeface="Calibri"/>
+              <a:sym typeface="Calibri"/>
+            </a:endParaRPr>
+          </a:p>
+          <a:p>
+            <a:pPr lvl="0"/>
+            <a:r>
+              <a:rPr lang="en-US" sz="1300" dirty="0">
+                <a:latin typeface="Calibri"/>
+                <a:ea typeface="Calibri"/>
+                <a:cs typeface="Calibri"/>
+                <a:sym typeface="Calibri"/>
+              </a:rPr>
+              <a:t>Using </a:t>
+            </a:r>
+            <a:r>
+              <a:rPr lang="en-US" b="1" i="1" dirty="0">
+                <a:solidFill>
+                  <a:srgbClr val="222222"/>
+                </a:solidFill>
+                <a:highlight>
+                  <a:srgbClr val="FFFFFF"/>
+                </a:highlight>
+                <a:latin typeface="Times New Roman"/>
+                <a:ea typeface="Times New Roman"/>
+                <a:cs typeface="Times New Roman"/>
+                <a:sym typeface="Times New Roman"/>
+              </a:rPr>
+              <a:t>χ</a:t>
+            </a:r>
+            <a:r>
+              <a:rPr lang="en-US" b="1" baseline="30000" dirty="0">
+                <a:solidFill>
+                  <a:srgbClr val="222222"/>
+                </a:solidFill>
+                <a:highlight>
+                  <a:srgbClr val="FFFFFF"/>
+                </a:highlight>
+                <a:latin typeface="Times New Roman"/>
+                <a:ea typeface="Times New Roman"/>
+                <a:cs typeface="Times New Roman"/>
+                <a:sym typeface="Times New Roman"/>
+              </a:rPr>
+              <a:t>2</a:t>
+            </a:r>
+            <a:r>
+              <a:rPr lang="en-US" b="1" dirty="0">
+                <a:latin typeface="Calibri"/>
+                <a:ea typeface="Calibri"/>
+                <a:cs typeface="Calibri"/>
+                <a:sym typeface="Calibri"/>
+              </a:rPr>
+              <a:t> </a:t>
+            </a:r>
+            <a:r>
+              <a:rPr lang="en-US" sz="1300" dirty="0">
+                <a:latin typeface="Calibri"/>
+                <a:cs typeface="Calibri"/>
+                <a:sym typeface="Calibri"/>
+              </a:rPr>
+              <a:t>goodness of fit test</a:t>
+            </a:r>
+          </a:p>
+          <a:p>
+            <a:pPr lvl="0"/>
+            <a:endParaRPr lang="en-US" sz="1300" dirty="0">
+              <a:latin typeface="Calibri"/>
+              <a:ea typeface="Calibri"/>
+              <a:cs typeface="Calibri"/>
+              <a:sym typeface="Calibri"/>
+            </a:endParaRPr>
+          </a:p>
+          <a:p>
+            <a:pPr lvl="0"/>
+            <a:r>
+              <a:rPr lang="en-US" sz="1300" dirty="0">
+                <a:latin typeface="Calibri"/>
+                <a:ea typeface="Calibri"/>
+                <a:cs typeface="Calibri"/>
+                <a:sym typeface="Calibri"/>
+              </a:rPr>
+              <a:t>X</a:t>
+            </a:r>
+            <a:r>
+              <a:rPr lang="en-US" sz="1300" baseline="30000" dirty="0">
+                <a:latin typeface="Calibri"/>
+                <a:ea typeface="Calibri"/>
+                <a:cs typeface="Calibri"/>
+                <a:sym typeface="Calibri"/>
+              </a:rPr>
+              <a:t>2</a:t>
+            </a:r>
+            <a:r>
+              <a:rPr lang="en-US" sz="1300" dirty="0">
+                <a:latin typeface="Calibri"/>
+                <a:ea typeface="Calibri"/>
+                <a:cs typeface="Calibri"/>
+                <a:sym typeface="Calibri"/>
+              </a:rPr>
+              <a:t> = sum( (observed – expected)</a:t>
+            </a:r>
+            <a:r>
+              <a:rPr lang="en-US" sz="1300" baseline="30000" dirty="0">
+                <a:latin typeface="Calibri"/>
+                <a:ea typeface="Calibri"/>
+                <a:cs typeface="Calibri"/>
+                <a:sym typeface="Calibri"/>
+              </a:rPr>
+              <a:t>2</a:t>
+            </a:r>
+            <a:r>
+              <a:rPr lang="en-US" sz="1300" dirty="0">
+                <a:latin typeface="Calibri"/>
+                <a:ea typeface="Calibri"/>
+                <a:cs typeface="Calibri"/>
+                <a:sym typeface="Calibri"/>
+              </a:rPr>
+              <a:t>/expected) = [ (H– N/2)</a:t>
+            </a:r>
+            <a:r>
+              <a:rPr lang="en-US" sz="1300" baseline="30000" dirty="0">
+                <a:latin typeface="Calibri"/>
+                <a:ea typeface="Calibri"/>
+                <a:cs typeface="Calibri"/>
+                <a:sym typeface="Calibri"/>
+              </a:rPr>
+              <a:t>2</a:t>
+            </a:r>
+            <a:r>
+              <a:rPr lang="en-US" sz="1300" dirty="0">
+                <a:latin typeface="Calibri"/>
+                <a:ea typeface="Calibri"/>
+                <a:cs typeface="Calibri"/>
+                <a:sym typeface="Calibri"/>
+              </a:rPr>
+              <a:t> / (N/2) ] + [ (T – N/2)</a:t>
+            </a:r>
+            <a:r>
+              <a:rPr lang="en-US" sz="1300" baseline="30000" dirty="0">
+                <a:latin typeface="Calibri"/>
+                <a:ea typeface="Calibri"/>
+                <a:cs typeface="Calibri"/>
+                <a:sym typeface="Calibri"/>
+              </a:rPr>
+              <a:t>2</a:t>
+            </a:r>
+            <a:r>
+              <a:rPr lang="en-US" sz="1300" dirty="0">
+                <a:latin typeface="Calibri"/>
+                <a:ea typeface="Calibri"/>
+                <a:cs typeface="Calibri"/>
+                <a:sym typeface="Calibri"/>
+              </a:rPr>
+              <a:t> / (N/2) ] </a:t>
+            </a:r>
+          </a:p>
+          <a:p>
+            <a:pPr marL="0" lvl="0" indent="0" algn="l" rtl="0">
+              <a:spcBef>
+                <a:spcPts val="0"/>
+              </a:spcBef>
+              <a:spcAft>
+                <a:spcPts val="0"/>
+              </a:spcAft>
+              <a:buClr>
+                <a:schemeClr val="dk1"/>
+              </a:buClr>
+              <a:buSzPts val="1100"/>
+              <a:buFont typeface="Arial"/>
+              <a:buNone/>
+            </a:pPr>
+            <a:endParaRPr sz="1300" dirty="0">
+              <a:latin typeface="Calibri"/>
+              <a:ea typeface="Calibri"/>
+              <a:cs typeface="Calibri"/>
+              <a:sym typeface="Calibri"/>
+            </a:endParaRPr>
+          </a:p>
+          <a:p>
+            <a:pPr marL="0" lvl="0" indent="0" algn="l" rtl="0">
+              <a:spcBef>
+                <a:spcPts val="0"/>
+              </a:spcBef>
+              <a:spcAft>
+                <a:spcPts val="0"/>
+              </a:spcAft>
+              <a:buClr>
+                <a:schemeClr val="dk1"/>
+              </a:buClr>
+              <a:buSzPts val="1100"/>
+              <a:buFont typeface="Arial"/>
+              <a:buNone/>
+            </a:pPr>
+            <a:r>
+              <a:rPr lang="en-US" sz="1300" dirty="0">
+                <a:latin typeface="Calibri"/>
+                <a:ea typeface="Calibri"/>
+                <a:cs typeface="Calibri"/>
+                <a:sym typeface="Calibri"/>
+              </a:rPr>
+              <a:t>The P-value is the probability that a chi-square statistic having one degree of freedom is more extreme than that value.</a:t>
+            </a:r>
+          </a:p>
+          <a:p>
+            <a:pPr marL="0" lvl="0" indent="0" algn="l" rtl="0">
+              <a:spcBef>
+                <a:spcPts val="0"/>
+              </a:spcBef>
+              <a:spcAft>
+                <a:spcPts val="0"/>
+              </a:spcAft>
+              <a:buClr>
+                <a:schemeClr val="dk1"/>
+              </a:buClr>
+              <a:buSzPts val="1100"/>
+              <a:buFont typeface="Arial"/>
+              <a:buNone/>
+            </a:pPr>
+            <a:endParaRPr lang="en-US" sz="1300" dirty="0">
+              <a:latin typeface="Calibri"/>
+              <a:ea typeface="Calibri"/>
+              <a:cs typeface="Calibri"/>
+              <a:sym typeface="Calibri"/>
+            </a:endParaRPr>
+          </a:p>
+          <a:p>
+            <a:pPr marL="0" lvl="0" indent="0" algn="l" rtl="0">
+              <a:spcBef>
+                <a:spcPts val="0"/>
+              </a:spcBef>
+              <a:spcAft>
+                <a:spcPts val="0"/>
+              </a:spcAft>
+              <a:buClr>
+                <a:schemeClr val="dk1"/>
+              </a:buClr>
+              <a:buSzPts val="1100"/>
+              <a:buFont typeface="Arial"/>
+              <a:buNone/>
+            </a:pPr>
+            <a:r>
+              <a:rPr lang="en-US" sz="1300" dirty="0">
+                <a:latin typeface="Calibri"/>
+                <a:ea typeface="Calibri"/>
+                <a:cs typeface="Calibri"/>
+                <a:sym typeface="Calibri"/>
+              </a:rPr>
+              <a:t>Specific example: </a:t>
+            </a:r>
+          </a:p>
+          <a:p>
+            <a:pPr marL="0" lvl="0" indent="0" algn="l" rtl="0">
+              <a:spcBef>
+                <a:spcPts val="0"/>
+              </a:spcBef>
+              <a:spcAft>
+                <a:spcPts val="0"/>
+              </a:spcAft>
+              <a:buClr>
+                <a:schemeClr val="dk1"/>
+              </a:buClr>
+              <a:buSzPts val="1100"/>
+              <a:buFont typeface="Arial"/>
+              <a:buNone/>
+            </a:pPr>
+            <a:r>
+              <a:rPr lang="en-US" sz="1300" dirty="0">
+                <a:latin typeface="Calibri"/>
+                <a:ea typeface="Calibri"/>
+                <a:cs typeface="Calibri"/>
+                <a:sym typeface="Calibri"/>
+              </a:rPr>
+              <a:t>       N=100, H=60, T=40</a:t>
+            </a:r>
+          </a:p>
+          <a:p>
+            <a:pPr marL="0" lvl="0" indent="0" algn="l" rtl="0">
+              <a:spcBef>
+                <a:spcPts val="0"/>
+              </a:spcBef>
+              <a:spcAft>
+                <a:spcPts val="0"/>
+              </a:spcAft>
+              <a:buClr>
+                <a:schemeClr val="dk1"/>
+              </a:buClr>
+              <a:buSzPts val="1100"/>
+              <a:buFont typeface="Arial"/>
+              <a:buNone/>
+            </a:pPr>
+            <a:endParaRPr lang="en-US" sz="1300" dirty="0">
+              <a:latin typeface="Calibri"/>
+              <a:ea typeface="Calibri"/>
+              <a:cs typeface="Calibri"/>
+              <a:sym typeface="Calibri"/>
+            </a:endParaRPr>
+          </a:p>
+          <a:p>
+            <a:pPr>
+              <a:buClr>
+                <a:schemeClr val="dk1"/>
+              </a:buClr>
+              <a:buSzPts val="1100"/>
+            </a:pPr>
+            <a:r>
+              <a:rPr lang="en-US" sz="1300" dirty="0">
+                <a:latin typeface="Calibri"/>
+                <a:ea typeface="Calibri"/>
+                <a:cs typeface="Calibri"/>
+                <a:sym typeface="Calibri"/>
+              </a:rPr>
+              <a:t>X</a:t>
+            </a:r>
+            <a:r>
+              <a:rPr lang="en-US" sz="1300" baseline="30000" dirty="0">
+                <a:latin typeface="Calibri"/>
+                <a:ea typeface="Calibri"/>
+                <a:cs typeface="Calibri"/>
+                <a:sym typeface="Calibri"/>
+              </a:rPr>
+              <a:t>2</a:t>
+            </a:r>
+            <a:r>
+              <a:rPr lang="en-US" sz="1300" dirty="0">
+                <a:latin typeface="Calibri"/>
+                <a:ea typeface="Calibri"/>
+                <a:cs typeface="Calibri"/>
+                <a:sym typeface="Calibri"/>
+              </a:rPr>
+              <a:t> = [ (60– 50)</a:t>
+            </a:r>
+            <a:r>
+              <a:rPr lang="en-US" sz="1300" baseline="30000" dirty="0">
+                <a:latin typeface="Calibri"/>
+                <a:ea typeface="Calibri"/>
+                <a:cs typeface="Calibri"/>
+                <a:sym typeface="Calibri"/>
+              </a:rPr>
+              <a:t>2</a:t>
+            </a:r>
+            <a:r>
+              <a:rPr lang="en-US" sz="1300" dirty="0">
+                <a:latin typeface="Calibri"/>
+                <a:ea typeface="Calibri"/>
+                <a:cs typeface="Calibri"/>
+                <a:sym typeface="Calibri"/>
+              </a:rPr>
+              <a:t> / 50 ] + [ (40 – 50)</a:t>
+            </a:r>
+            <a:r>
+              <a:rPr lang="en-US" sz="1300" baseline="30000" dirty="0">
+                <a:latin typeface="Calibri"/>
+                <a:ea typeface="Calibri"/>
+                <a:cs typeface="Calibri"/>
+                <a:sym typeface="Calibri"/>
+              </a:rPr>
+              <a:t>2</a:t>
+            </a:r>
+            <a:r>
+              <a:rPr lang="en-US" sz="1300" dirty="0">
+                <a:latin typeface="Calibri"/>
+                <a:ea typeface="Calibri"/>
+                <a:cs typeface="Calibri"/>
+                <a:sym typeface="Calibri"/>
+              </a:rPr>
+              <a:t> / 50 ] = 10</a:t>
+            </a:r>
+            <a:r>
+              <a:rPr lang="en-US" sz="1300" baseline="30000" dirty="0">
+                <a:latin typeface="Calibri"/>
+                <a:ea typeface="Calibri"/>
+                <a:cs typeface="Calibri"/>
+                <a:sym typeface="Calibri"/>
+              </a:rPr>
+              <a:t>2</a:t>
+            </a:r>
+            <a:r>
+              <a:rPr lang="en-US" sz="1300" dirty="0">
+                <a:latin typeface="Calibri"/>
+                <a:ea typeface="Calibri"/>
+                <a:cs typeface="Calibri"/>
+                <a:sym typeface="Calibri"/>
+              </a:rPr>
+              <a:t> / 50  + 10</a:t>
+            </a:r>
+            <a:r>
+              <a:rPr lang="en-US" sz="1300" baseline="30000" dirty="0">
+                <a:latin typeface="Calibri"/>
+                <a:ea typeface="Calibri"/>
+                <a:cs typeface="Calibri"/>
+                <a:sym typeface="Calibri"/>
+              </a:rPr>
+              <a:t>2</a:t>
+            </a:r>
+            <a:r>
+              <a:rPr lang="en-US" sz="1300" dirty="0">
+                <a:latin typeface="Calibri"/>
+                <a:ea typeface="Calibri"/>
+                <a:cs typeface="Calibri"/>
+                <a:sym typeface="Calibri"/>
+              </a:rPr>
+              <a:t> / 50 = 2+2 = 4</a:t>
+            </a:r>
+          </a:p>
+          <a:p>
+            <a:pPr>
+              <a:buClr>
+                <a:schemeClr val="dk1"/>
+              </a:buClr>
+              <a:buSzPts val="1100"/>
+            </a:pPr>
+            <a:endParaRPr lang="en-US" sz="1300" dirty="0">
+              <a:latin typeface="Calibri"/>
+              <a:ea typeface="Calibri"/>
+              <a:cs typeface="Calibri"/>
+              <a:sym typeface="Calibri"/>
+            </a:endParaRPr>
+          </a:p>
+          <a:p>
+            <a:pPr>
+              <a:buClr>
+                <a:schemeClr val="dk1"/>
+              </a:buClr>
+              <a:buSzPts val="1100"/>
+            </a:pPr>
+            <a:r>
+              <a:rPr lang="en-US" sz="1300" dirty="0">
+                <a:latin typeface="Calibri"/>
+                <a:ea typeface="Calibri"/>
+                <a:cs typeface="Calibri"/>
+                <a:sym typeface="Calibri"/>
+              </a:rPr>
+              <a:t>X</a:t>
+            </a:r>
+            <a:r>
+              <a:rPr lang="en-US" sz="1300" baseline="30000" dirty="0">
+                <a:latin typeface="Calibri"/>
+                <a:ea typeface="Calibri"/>
+                <a:cs typeface="Calibri"/>
+                <a:sym typeface="Calibri"/>
+              </a:rPr>
+              <a:t>2</a:t>
+            </a:r>
+            <a:r>
+              <a:rPr lang="en-US" sz="1300" dirty="0">
+                <a:latin typeface="Calibri"/>
+                <a:ea typeface="Calibri"/>
+                <a:cs typeface="Calibri"/>
+                <a:sym typeface="Calibri"/>
+              </a:rPr>
+              <a:t> distribution for 1 degree of freedom gives 3.84 for P-value P=0.05.</a:t>
+            </a:r>
+          </a:p>
+          <a:p>
+            <a:pPr>
+              <a:buClr>
+                <a:schemeClr val="dk1"/>
+              </a:buClr>
+              <a:buSzPts val="1100"/>
+            </a:pPr>
+            <a:r>
+              <a:rPr lang="en-US" sz="1300" dirty="0">
+                <a:latin typeface="Calibri"/>
+                <a:ea typeface="Calibri"/>
+                <a:cs typeface="Calibri"/>
+                <a:sym typeface="Calibri"/>
+              </a:rPr>
+              <a:t>We have 4, which is more extreme. </a:t>
+            </a:r>
+          </a:p>
+          <a:p>
+            <a:pPr>
+              <a:buClr>
+                <a:schemeClr val="dk1"/>
+              </a:buClr>
+              <a:buSzPts val="1100"/>
+            </a:pPr>
+            <a:r>
+              <a:rPr lang="en-US" sz="1300" dirty="0">
+                <a:latin typeface="Calibri"/>
+                <a:ea typeface="Calibri"/>
+                <a:cs typeface="Calibri"/>
+                <a:sym typeface="Calibri"/>
+              </a:rPr>
+              <a:t>So we reject the null hypothesis (that the coin is fair).</a:t>
+            </a:r>
+          </a:p>
+          <a:p>
+            <a:pPr>
+              <a:buClr>
+                <a:schemeClr val="dk1"/>
+              </a:buClr>
+              <a:buSzPts val="1100"/>
+            </a:pPr>
+            <a:endParaRPr lang="en-US" sz="1300" dirty="0">
+              <a:latin typeface="Calibri"/>
+              <a:ea typeface="Calibri"/>
+              <a:cs typeface="Calibri"/>
+              <a:sym typeface="Calibri"/>
+            </a:endParaRPr>
+          </a:p>
+          <a:p>
+            <a:pPr>
+              <a:buClr>
+                <a:schemeClr val="dk1"/>
+              </a:buClr>
+              <a:buSzPts val="1100"/>
+            </a:pPr>
+            <a:endParaRPr lang="en-US" sz="1300" dirty="0">
+              <a:latin typeface="Calibri"/>
+              <a:ea typeface="Calibri"/>
+              <a:cs typeface="Calibri"/>
+              <a:sym typeface="Calibri"/>
+            </a:endParaRPr>
+          </a:p>
+        </p:txBody>
+      </p:sp>
+      <p:pic>
+        <p:nvPicPr>
+          <p:cNvPr id="5" name="Picture 4">
+            <a:extLst>
+              <a:ext uri="{FF2B5EF4-FFF2-40B4-BE49-F238E27FC236}">
+                <a16:creationId xmlns:a16="http://schemas.microsoft.com/office/drawing/2014/main" id="{FC02FCE1-51F8-CF47-AD22-F756CF53965A}"/>
+              </a:ext>
+            </a:extLst>
+          </p:cNvPr>
+          <p:cNvPicPr>
+            <a:picLocks noChangeAspect="1"/>
+          </p:cNvPicPr>
+          <p:nvPr/>
+        </p:nvPicPr>
+        <p:blipFill rotWithShape="1">
+          <a:blip r:embed="rId2" cstate="email">
+            <a:extLst>
+              <a:ext uri="{28A0092B-C50C-407E-A947-70E740481C1C}">
+                <a14:useLocalDpi xmlns:a14="http://schemas.microsoft.com/office/drawing/2010/main"/>
+              </a:ext>
+            </a:extLst>
+          </a:blip>
+          <a:srcRect/>
+          <a:stretch/>
+        </p:blipFill>
+        <p:spPr>
+          <a:xfrm>
+            <a:off x="7556584" y="662608"/>
+            <a:ext cx="4049486" cy="3180523"/>
+          </a:xfrm>
+          <a:prstGeom prst="rect">
+            <a:avLst/>
+          </a:prstGeom>
+        </p:spPr>
+      </p:pic>
+      <p:sp>
+        <p:nvSpPr>
+          <p:cNvPr id="6" name="TextBox 5">
+            <a:extLst>
+              <a:ext uri="{FF2B5EF4-FFF2-40B4-BE49-F238E27FC236}">
+                <a16:creationId xmlns:a16="http://schemas.microsoft.com/office/drawing/2014/main" id="{F9CD06EB-7D73-6747-8B8D-655F4F207CAE}"/>
+              </a:ext>
+            </a:extLst>
+          </p:cNvPr>
+          <p:cNvSpPr txBox="1"/>
+          <p:nvPr/>
+        </p:nvSpPr>
+        <p:spPr>
+          <a:xfrm>
+            <a:off x="10486259" y="755596"/>
+            <a:ext cx="808383" cy="707886"/>
+          </a:xfrm>
+          <a:prstGeom prst="rect">
+            <a:avLst/>
+          </a:prstGeom>
+          <a:noFill/>
+        </p:spPr>
+        <p:txBody>
+          <a:bodyPr wrap="square" rtlCol="0">
+            <a:spAutoFit/>
+          </a:bodyPr>
+          <a:lstStyle/>
+          <a:p>
+            <a:r>
+              <a:rPr lang="en-US" sz="4000" b="1" i="1" dirty="0">
+                <a:solidFill>
+                  <a:srgbClr val="222222"/>
+                </a:solidFill>
+                <a:highlight>
+                  <a:srgbClr val="FFFFFF"/>
+                </a:highlight>
+                <a:latin typeface="Times New Roman"/>
+                <a:ea typeface="Times New Roman"/>
+                <a:cs typeface="Times New Roman"/>
+                <a:sym typeface="Times New Roman"/>
+              </a:rPr>
+              <a:t>χ</a:t>
+            </a:r>
+            <a:r>
+              <a:rPr lang="en-US" sz="4000" b="1" baseline="30000" dirty="0">
+                <a:solidFill>
+                  <a:srgbClr val="222222"/>
+                </a:solidFill>
+                <a:highlight>
+                  <a:srgbClr val="FFFFFF"/>
+                </a:highlight>
+                <a:latin typeface="Times New Roman"/>
+                <a:ea typeface="Times New Roman"/>
+                <a:cs typeface="Times New Roman"/>
+                <a:sym typeface="Times New Roman"/>
+              </a:rPr>
+              <a:t>2</a:t>
+            </a:r>
+            <a:endParaRPr lang="en-US" sz="4000" dirty="0"/>
+          </a:p>
+        </p:txBody>
+      </p:sp>
+      <p:sp>
+        <p:nvSpPr>
+          <p:cNvPr id="7" name="Oval 6">
+            <a:extLst>
+              <a:ext uri="{FF2B5EF4-FFF2-40B4-BE49-F238E27FC236}">
+                <a16:creationId xmlns:a16="http://schemas.microsoft.com/office/drawing/2014/main" id="{A138FD90-7D86-7947-B9C9-3970A771F11A}"/>
+              </a:ext>
+            </a:extLst>
+          </p:cNvPr>
+          <p:cNvSpPr/>
+          <p:nvPr/>
+        </p:nvSpPr>
+        <p:spPr>
+          <a:xfrm>
+            <a:off x="10137913" y="662608"/>
+            <a:ext cx="1169981" cy="980661"/>
+          </a:xfrm>
+          <a:prstGeom prst="ellipse">
+            <a:avLst/>
+          </a:prstGeom>
+          <a:noFill/>
+        </p:spPr>
+        <p:style>
+          <a:lnRef idx="2">
+            <a:schemeClr val="accent1">
+              <a:shade val="50000"/>
+            </a:schemeClr>
+          </a:lnRef>
+          <a:fillRef idx="1">
+            <a:schemeClr val="accent1"/>
+          </a:fillRef>
+          <a:effectRef idx="0">
+            <a:schemeClr val="accent1"/>
+          </a:effectRef>
+          <a:fontRef idx="minor">
+            <a:schemeClr val="lt1"/>
+          </a:fontRef>
+        </p:style>
+        <p:txBody>
+          <a:bodyPr rtlCol="0" anchor="ctr"/>
+          <a:lstStyle/>
+          <a:p>
+            <a:pPr algn="ctr"/>
+            <a:endParaRPr lang="en-US"/>
+          </a:p>
+        </p:txBody>
+      </p:sp>
+      <p:pic>
+        <p:nvPicPr>
+          <p:cNvPr id="8" name="Picture 7">
+            <a:extLst>
+              <a:ext uri="{FF2B5EF4-FFF2-40B4-BE49-F238E27FC236}">
+                <a16:creationId xmlns:a16="http://schemas.microsoft.com/office/drawing/2014/main" id="{9A25444D-FF1F-1B4F-9E2D-91F9E45E1FC7}"/>
+              </a:ext>
+            </a:extLst>
+          </p:cNvPr>
+          <p:cNvPicPr>
+            <a:picLocks noChangeAspect="1"/>
+          </p:cNvPicPr>
+          <p:nvPr/>
+        </p:nvPicPr>
+        <p:blipFill>
+          <a:blip r:embed="rId3" cstate="email">
+            <a:extLst>
+              <a:ext uri="{28A0092B-C50C-407E-A947-70E740481C1C}">
+                <a14:useLocalDpi xmlns:a14="http://schemas.microsoft.com/office/drawing/2010/main"/>
+              </a:ext>
+            </a:extLst>
+          </a:blip>
+          <a:stretch>
+            <a:fillRect/>
+          </a:stretch>
+        </p:blipFill>
+        <p:spPr>
+          <a:xfrm>
+            <a:off x="8106703" y="4865204"/>
+            <a:ext cx="2616200" cy="838200"/>
+          </a:xfrm>
+          <a:prstGeom prst="rect">
+            <a:avLst/>
+          </a:prstGeom>
+        </p:spPr>
+      </p:pic>
+    </p:spTree>
+    <p:extLst>
+      <p:ext uri="{BB962C8B-B14F-4D97-AF65-F5344CB8AC3E}">
+        <p14:creationId xmlns:p14="http://schemas.microsoft.com/office/powerpoint/2010/main" val="364448510"/>
+      </p:ext>
+    </p:extLst>
+  </p:cSld>
+  <p:clrMapOvr>
+    <a:masterClrMapping/>
+  </p:clrMapOvr>
+</p:sld>
+</file>
+
+<file path=ppt/slides/slide11.xml><?xml version="1.0" encoding="utf-8"?>
+<p:sld xmlns:a="http://schemas.openxmlformats.org/drawingml/2006/main" xmlns:r="http://schemas.openxmlformats.org/officeDocument/2006/relationships" xmlns:p="http://schemas.openxmlformats.org/presentationml/2006/main">
+  <p:cSld>
+    <p:spTree>
+      <p:nvGrpSpPr>
+        <p:cNvPr id="1" name=""/>
+        <p:cNvGrpSpPr/>
+        <p:nvPr/>
+      </p:nvGrpSpPr>
+      <p:grpSpPr>
+        <a:xfrm>
+          <a:off x="0" y="0"/>
+          <a:ext cx="0" cy="0"/>
+          <a:chOff x="0" y="0"/>
+          <a:chExt cx="0" cy="0"/>
+        </a:xfrm>
+      </p:grpSpPr>
+      <p:sp>
+        <p:nvSpPr>
+          <p:cNvPr id="4" name="Google Shape;130;p18">
+            <a:extLst>
+              <a:ext uri="{FF2B5EF4-FFF2-40B4-BE49-F238E27FC236}">
+                <a16:creationId xmlns:a16="http://schemas.microsoft.com/office/drawing/2014/main" id="{6F73DBF3-377D-DC49-AED2-EC061EC41127}"/>
+              </a:ext>
+            </a:extLst>
+          </p:cNvPr>
+          <p:cNvSpPr txBox="1"/>
+          <p:nvPr/>
+        </p:nvSpPr>
+        <p:spPr>
+          <a:xfrm>
             <a:off x="0" y="57383"/>
             <a:ext cx="5913120" cy="6800617"/>
           </a:xfrm>
@@ -16572,7 +17521,7 @@
 </p:sld>
 </file>
 
-<file path=ppt/slides/slide11.xml><?xml version="1.0" encoding="utf-8"?>
+<file path=ppt/slides/slide12.xml><?xml version="1.0" encoding="utf-8"?>
 <p:sld xmlns:a="http://schemas.openxmlformats.org/drawingml/2006/main" xmlns:r="http://schemas.openxmlformats.org/officeDocument/2006/relationships" xmlns:p="http://schemas.openxmlformats.org/presentationml/2006/main">
   <p:cSld>
     <p:spTree>
@@ -17443,7 +18392,7 @@
 </p:sld>
 </file>
 
-<file path=ppt/slides/slide12.xml><?xml version="1.0" encoding="utf-8"?>
+<file path=ppt/slides/slide13.xml><?xml version="1.0" encoding="utf-8"?>
 <p:sld xmlns:a="http://schemas.openxmlformats.org/drawingml/2006/main" xmlns:r="http://schemas.openxmlformats.org/officeDocument/2006/relationships" xmlns:p="http://schemas.openxmlformats.org/presentationml/2006/main">
   <p:cSld>
     <p:spTree>
@@ -17709,7 +18658,7 @@
 </p:sld>
 </file>
 
-<file path=ppt/slides/slide13.xml><?xml version="1.0" encoding="utf-8"?>
+<file path=ppt/slides/slide14.xml><?xml version="1.0" encoding="utf-8"?>
 <p:sld xmlns:a="http://schemas.openxmlformats.org/drawingml/2006/main" xmlns:r="http://schemas.openxmlformats.org/officeDocument/2006/relationships" xmlns:p="http://schemas.openxmlformats.org/presentationml/2006/main">
   <p:cSld>
     <p:spTree>
@@ -18977,7 +19926,7 @@
 </p:sld>
 </file>
 
-<file path=ppt/slides/slide14.xml><?xml version="1.0" encoding="utf-8"?>
+<file path=ppt/slides/slide15.xml><?xml version="1.0" encoding="utf-8"?>
 <p:sld xmlns:a="http://schemas.openxmlformats.org/drawingml/2006/main" xmlns:r="http://schemas.openxmlformats.org/officeDocument/2006/relationships" xmlns:p="http://schemas.openxmlformats.org/presentationml/2006/main">
   <p:cSld>
     <p:spTree>
@@ -19827,7 +20776,7 @@
 </p:sld>
 </file>
 
-<file path=ppt/slides/slide15.xml><?xml version="1.0" encoding="utf-8"?>
+<file path=ppt/slides/slide16.xml><?xml version="1.0" encoding="utf-8"?>
 <p:sld xmlns:a="http://schemas.openxmlformats.org/drawingml/2006/main" xmlns:r="http://schemas.openxmlformats.org/officeDocument/2006/relationships" xmlns:p="http://schemas.openxmlformats.org/presentationml/2006/main">
   <p:cSld>
     <p:spTree>
@@ -20162,7 +21111,7 @@
 </p:sld>
 </file>
 
-<file path=ppt/slides/slide16.xml><?xml version="1.0" encoding="utf-8"?>
+<file path=ppt/slides/slide17.xml><?xml version="1.0" encoding="utf-8"?>
 <p:sld xmlns:a="http://schemas.openxmlformats.org/drawingml/2006/main" xmlns:r="http://schemas.openxmlformats.org/officeDocument/2006/relationships" xmlns:p="http://schemas.openxmlformats.org/presentationml/2006/main">
   <p:cSld>
     <p:spTree>
@@ -20437,6 +21386,1117 @@
 </file>
 
 <file path=ppt/slides/slide2.xml><?xml version="1.0" encoding="utf-8"?>
+<p:sld xmlns:a="http://schemas.openxmlformats.org/drawingml/2006/main" xmlns:r="http://schemas.openxmlformats.org/officeDocument/2006/relationships" xmlns:p="http://schemas.openxmlformats.org/presentationml/2006/main">
+  <p:cSld>
+    <p:spTree>
+      <p:nvGrpSpPr>
+        <p:cNvPr id="1" name=""/>
+        <p:cNvGrpSpPr/>
+        <p:nvPr/>
+      </p:nvGrpSpPr>
+      <p:grpSpPr>
+        <a:xfrm>
+          <a:off x="0" y="0"/>
+          <a:ext cx="0" cy="0"/>
+          <a:chOff x="0" y="0"/>
+          <a:chExt cx="0" cy="0"/>
+        </a:xfrm>
+      </p:grpSpPr>
+      <p:sp>
+        <p:nvSpPr>
+          <p:cNvPr id="4" name="Google Shape;88;p13">
+            <a:extLst>
+              <a:ext uri="{FF2B5EF4-FFF2-40B4-BE49-F238E27FC236}">
+                <a16:creationId xmlns:a16="http://schemas.microsoft.com/office/drawing/2014/main" id="{4DCBD493-C3BD-768D-B475-909A8038CBB5}"/>
+              </a:ext>
+            </a:extLst>
+          </p:cNvPr>
+          <p:cNvSpPr txBox="1"/>
+          <p:nvPr/>
+        </p:nvSpPr>
+        <p:spPr>
+          <a:xfrm>
+            <a:off x="0" y="64194"/>
+            <a:ext cx="4564879" cy="595013"/>
+          </a:xfrm>
+          <a:prstGeom prst="rect">
+            <a:avLst/>
+          </a:prstGeom>
+          <a:noFill/>
+          <a:ln>
+            <a:noFill/>
+          </a:ln>
+        </p:spPr>
+        <p:txBody>
+          <a:bodyPr spcFirstLastPara="1" wrap="square" lIns="91425" tIns="45700" rIns="91425" bIns="45700" anchor="t" anchorCtr="0">
+            <a:noAutofit/>
+          </a:bodyPr>
+          <a:lstStyle/>
+          <a:p>
+            <a:pPr marL="0" marR="0" lvl="0" indent="0" algn="l" rtl="0">
+              <a:spcBef>
+                <a:spcPts val="0"/>
+              </a:spcBef>
+              <a:spcAft>
+                <a:spcPts val="0"/>
+              </a:spcAft>
+              <a:buNone/>
+            </a:pPr>
+            <a:r>
+              <a:rPr lang="en-US" sz="3200" b="1" i="0" u="none" strike="noStrike" cap="none" dirty="0">
+                <a:solidFill>
+                  <a:schemeClr val="dk1"/>
+                </a:solidFill>
+                <a:latin typeface="Calibri"/>
+                <a:ea typeface="Calibri"/>
+                <a:cs typeface="Calibri"/>
+                <a:sym typeface="Calibri"/>
+              </a:rPr>
+              <a:t>Type I and Type II Errors</a:t>
+            </a:r>
+            <a:endParaRPr dirty="0"/>
+          </a:p>
+          <a:p>
+            <a:pPr marL="0" marR="0" lvl="0" indent="0" algn="l" rtl="0">
+              <a:spcBef>
+                <a:spcPts val="0"/>
+              </a:spcBef>
+              <a:spcAft>
+                <a:spcPts val="0"/>
+              </a:spcAft>
+              <a:buNone/>
+            </a:pPr>
+            <a:endParaRPr sz="1800" dirty="0">
+              <a:solidFill>
+                <a:schemeClr val="dk1"/>
+              </a:solidFill>
+              <a:latin typeface="Calibri"/>
+              <a:ea typeface="Calibri"/>
+              <a:cs typeface="Calibri"/>
+              <a:sym typeface="Calibri"/>
+            </a:endParaRPr>
+          </a:p>
+        </p:txBody>
+      </p:sp>
+      <p:sp>
+        <p:nvSpPr>
+          <p:cNvPr id="5" name="Google Shape;108;p15">
+            <a:extLst>
+              <a:ext uri="{FF2B5EF4-FFF2-40B4-BE49-F238E27FC236}">
+                <a16:creationId xmlns:a16="http://schemas.microsoft.com/office/drawing/2014/main" id="{894BDE4C-6D93-69DE-57F8-1ACA61335B70}"/>
+              </a:ext>
+            </a:extLst>
+          </p:cNvPr>
+          <p:cNvSpPr txBox="1"/>
+          <p:nvPr/>
+        </p:nvSpPr>
+        <p:spPr>
+          <a:xfrm>
+            <a:off x="232587" y="859486"/>
+            <a:ext cx="4865634" cy="2339072"/>
+          </a:xfrm>
+          <a:prstGeom prst="rect">
+            <a:avLst/>
+          </a:prstGeom>
+          <a:solidFill>
+            <a:schemeClr val="accent4">
+              <a:lumMod val="20000"/>
+              <a:lumOff val="80000"/>
+            </a:schemeClr>
+          </a:solidFill>
+          <a:ln>
+            <a:noFill/>
+          </a:ln>
+        </p:spPr>
+        <p:txBody>
+          <a:bodyPr spcFirstLastPara="1" wrap="square" lIns="91440" tIns="91425" rIns="91425" bIns="91425" anchor="t" anchorCtr="0">
+            <a:spAutoFit/>
+          </a:bodyPr>
+          <a:lstStyle/>
+          <a:p>
+            <a:pPr marL="0" marR="0" lvl="0" indent="0" algn="l" rtl="0">
+              <a:lnSpc>
+                <a:spcPct val="100000"/>
+              </a:lnSpc>
+              <a:spcBef>
+                <a:spcPts val="0"/>
+              </a:spcBef>
+              <a:spcAft>
+                <a:spcPts val="0"/>
+              </a:spcAft>
+              <a:buNone/>
+            </a:pPr>
+            <a:r>
+              <a:rPr lang="en-US" b="1" dirty="0">
+                <a:solidFill>
+                  <a:schemeClr val="dk1"/>
+                </a:solidFill>
+                <a:latin typeface="Calibri"/>
+                <a:ea typeface="Calibri"/>
+                <a:cs typeface="Calibri"/>
+                <a:sym typeface="Calibri"/>
+              </a:rPr>
+              <a:t>Two types of Errors:</a:t>
+            </a:r>
+          </a:p>
+          <a:p>
+            <a:pPr marL="285750" marR="0" lvl="0" indent="-285750" algn="l" rtl="0">
+              <a:lnSpc>
+                <a:spcPct val="100000"/>
+              </a:lnSpc>
+              <a:spcBef>
+                <a:spcPts val="0"/>
+              </a:spcBef>
+              <a:spcAft>
+                <a:spcPts val="0"/>
+              </a:spcAft>
+              <a:buFont typeface="Arial" panose="020B0604020202020204" pitchFamily="34" charset="0"/>
+              <a:buChar char="•"/>
+            </a:pPr>
+            <a:r>
+              <a:rPr lang="en-US" b="1" dirty="0">
+                <a:solidFill>
+                  <a:srgbClr val="FF0000"/>
+                </a:solidFill>
+                <a:latin typeface="Calibri"/>
+                <a:ea typeface="Calibri"/>
+                <a:cs typeface="Calibri"/>
+                <a:sym typeface="Calibri"/>
+              </a:rPr>
+              <a:t>Type I error</a:t>
+            </a:r>
+            <a:r>
+              <a:rPr lang="en-US" dirty="0">
+                <a:solidFill>
+                  <a:schemeClr val="dk1"/>
+                </a:solidFill>
+                <a:latin typeface="Calibri"/>
+                <a:ea typeface="Calibri"/>
+                <a:cs typeface="Calibri"/>
+                <a:sym typeface="Calibri"/>
+              </a:rPr>
+              <a:t> - false rejection of the null hypothesis </a:t>
+            </a:r>
+            <a:br>
+              <a:rPr lang="en-US" dirty="0">
+                <a:solidFill>
+                  <a:schemeClr val="dk1"/>
+                </a:solidFill>
+                <a:latin typeface="Calibri"/>
+                <a:ea typeface="Calibri"/>
+                <a:cs typeface="Calibri"/>
+                <a:sym typeface="Calibri"/>
+              </a:rPr>
+            </a:br>
+            <a:r>
+              <a:rPr lang="en-US" dirty="0">
+                <a:solidFill>
+                  <a:schemeClr val="dk1"/>
+                </a:solidFill>
+                <a:latin typeface="Calibri"/>
+                <a:ea typeface="Calibri"/>
+                <a:cs typeface="Calibri"/>
+                <a:sym typeface="Calibri"/>
+              </a:rPr>
+              <a:t>"false-positive" conclusion:</a:t>
+            </a:r>
+            <a:br>
+              <a:rPr lang="en-US" dirty="0">
+                <a:solidFill>
+                  <a:schemeClr val="dk1"/>
+                </a:solidFill>
+                <a:latin typeface="Calibri"/>
+                <a:ea typeface="Calibri"/>
+                <a:cs typeface="Calibri"/>
+                <a:sym typeface="Calibri"/>
+              </a:rPr>
+            </a:br>
+            <a:r>
+              <a:rPr lang="en-US" dirty="0">
+                <a:solidFill>
+                  <a:schemeClr val="dk1"/>
+                </a:solidFill>
+                <a:latin typeface="Calibri"/>
+                <a:ea typeface="Calibri"/>
+                <a:cs typeface="Calibri"/>
+                <a:sym typeface="Calibri"/>
+              </a:rPr>
+              <a:t>.. innocent person convicted</a:t>
+            </a:r>
+            <a:br>
+              <a:rPr lang="en-US" dirty="0">
+                <a:solidFill>
+                  <a:schemeClr val="dk1"/>
+                </a:solidFill>
+                <a:latin typeface="Calibri"/>
+                <a:ea typeface="Calibri"/>
+                <a:cs typeface="Calibri"/>
+                <a:sym typeface="Calibri"/>
+              </a:rPr>
+            </a:br>
+            <a:r>
+              <a:rPr lang="en-US" dirty="0">
+                <a:solidFill>
+                  <a:schemeClr val="dk1"/>
+                </a:solidFill>
+                <a:latin typeface="Calibri"/>
+                <a:ea typeface="Calibri"/>
+                <a:cs typeface="Calibri"/>
+                <a:sym typeface="Calibri"/>
+              </a:rPr>
+              <a:t>.. positive COVID test for a healthy person </a:t>
+            </a:r>
+          </a:p>
+          <a:p>
+            <a:pPr marR="0" lvl="0" algn="l" rtl="0">
+              <a:lnSpc>
+                <a:spcPct val="100000"/>
+              </a:lnSpc>
+              <a:spcBef>
+                <a:spcPts val="0"/>
+              </a:spcBef>
+              <a:spcAft>
+                <a:spcPts val="0"/>
+              </a:spcAft>
+            </a:pPr>
+            <a:endParaRPr dirty="0">
+              <a:solidFill>
+                <a:schemeClr val="dk1"/>
+              </a:solidFill>
+              <a:latin typeface="Calibri"/>
+              <a:ea typeface="Calibri"/>
+              <a:cs typeface="Calibri"/>
+              <a:sym typeface="Calibri"/>
+            </a:endParaRPr>
+          </a:p>
+          <a:p>
+            <a:pPr marL="285750" lvl="0" indent="-285750">
+              <a:buFont typeface="Arial" panose="020B0604020202020204" pitchFamily="34" charset="0"/>
+              <a:buChar char="•"/>
+            </a:pPr>
+            <a:r>
+              <a:rPr lang="en-US" b="1" dirty="0">
+                <a:solidFill>
+                  <a:srgbClr val="FF0000"/>
+                </a:solidFill>
+                <a:latin typeface="Calibri"/>
+                <a:ea typeface="Calibri"/>
+                <a:cs typeface="Calibri"/>
+                <a:sym typeface="Calibri"/>
+              </a:rPr>
+              <a:t>Type II error</a:t>
+            </a:r>
+            <a:r>
+              <a:rPr lang="en-US" dirty="0">
+                <a:solidFill>
+                  <a:schemeClr val="dk1"/>
+                </a:solidFill>
+                <a:latin typeface="Calibri"/>
+                <a:ea typeface="Calibri"/>
+                <a:cs typeface="Calibri"/>
+                <a:sym typeface="Calibri"/>
+              </a:rPr>
+              <a:t> - false acceptance of the null hypothesis</a:t>
+            </a:r>
+            <a:br>
+              <a:rPr lang="en-US" dirty="0">
+                <a:solidFill>
+                  <a:schemeClr val="dk1"/>
+                </a:solidFill>
+                <a:latin typeface="Calibri"/>
+                <a:ea typeface="Calibri"/>
+                <a:cs typeface="Calibri"/>
+                <a:sym typeface="Calibri"/>
+              </a:rPr>
+            </a:br>
+            <a:r>
+              <a:rPr lang="en-US" dirty="0">
+                <a:solidFill>
+                  <a:schemeClr val="dk1"/>
+                </a:solidFill>
+                <a:latin typeface="Calibri"/>
+                <a:ea typeface="Calibri"/>
+                <a:cs typeface="Calibri"/>
+                <a:sym typeface="Calibri"/>
+              </a:rPr>
+              <a:t>"false negative" conclusion:</a:t>
+            </a:r>
+            <a:br>
+              <a:rPr lang="en-US" dirty="0">
+                <a:solidFill>
+                  <a:schemeClr val="dk1"/>
+                </a:solidFill>
+                <a:latin typeface="Calibri"/>
+                <a:ea typeface="Calibri"/>
+                <a:cs typeface="Calibri"/>
+                <a:sym typeface="Calibri"/>
+              </a:rPr>
+            </a:br>
+            <a:r>
+              <a:rPr lang="en-US" dirty="0">
+                <a:solidFill>
+                  <a:schemeClr val="dk1"/>
+                </a:solidFill>
+                <a:latin typeface="Calibri"/>
+                <a:ea typeface="Calibri"/>
+                <a:cs typeface="Calibri"/>
+                <a:sym typeface="Calibri"/>
+              </a:rPr>
+              <a:t>.. guilty person not convicted</a:t>
+            </a:r>
+            <a:br>
+              <a:rPr lang="en-US" dirty="0">
+                <a:solidFill>
+                  <a:schemeClr val="dk1"/>
+                </a:solidFill>
+                <a:latin typeface="Calibri"/>
+                <a:ea typeface="Calibri"/>
+                <a:cs typeface="Calibri"/>
+                <a:sym typeface="Calibri"/>
+              </a:rPr>
+            </a:br>
+            <a:r>
+              <a:rPr lang="en-US" dirty="0">
+                <a:solidFill>
+                  <a:schemeClr val="dk1"/>
+                </a:solidFill>
+                <a:latin typeface="Calibri"/>
+                <a:ea typeface="Calibri"/>
+                <a:cs typeface="Calibri"/>
+                <a:sym typeface="Calibri"/>
+              </a:rPr>
+              <a:t>.. sick person is released as healthy</a:t>
+            </a:r>
+            <a:endParaRPr dirty="0">
+              <a:solidFill>
+                <a:schemeClr val="dk1"/>
+              </a:solidFill>
+              <a:latin typeface="Calibri"/>
+              <a:ea typeface="Calibri"/>
+              <a:cs typeface="Calibri"/>
+              <a:sym typeface="Calibri"/>
+            </a:endParaRPr>
+          </a:p>
+        </p:txBody>
+      </p:sp>
+      <p:graphicFrame>
+        <p:nvGraphicFramePr>
+          <p:cNvPr id="6" name="Google Shape;109;p15">
+            <a:extLst>
+              <a:ext uri="{FF2B5EF4-FFF2-40B4-BE49-F238E27FC236}">
+                <a16:creationId xmlns:a16="http://schemas.microsoft.com/office/drawing/2014/main" id="{4AE81F05-5ED1-B097-0F94-8C22EA3705E0}"/>
+              </a:ext>
+            </a:extLst>
+          </p:cNvPr>
+          <p:cNvGraphicFramePr/>
+          <p:nvPr/>
+        </p:nvGraphicFramePr>
+        <p:xfrm>
+          <a:off x="6672423" y="659207"/>
+          <a:ext cx="4865634" cy="1615350"/>
+        </p:xfrm>
+        <a:graphic>
+          <a:graphicData uri="http://schemas.openxmlformats.org/drawingml/2006/table">
+            <a:tbl>
+              <a:tblPr>
+                <a:noFill/>
+              </a:tblPr>
+              <a:tblGrid>
+                <a:gridCol w="1621878">
+                  <a:extLst>
+                    <a:ext uri="{9D8B030D-6E8A-4147-A177-3AD203B41FA5}">
+                      <a16:colId xmlns:a16="http://schemas.microsoft.com/office/drawing/2014/main" val="20000"/>
+                    </a:ext>
+                  </a:extLst>
+                </a:gridCol>
+                <a:gridCol w="1621878">
+                  <a:extLst>
+                    <a:ext uri="{9D8B030D-6E8A-4147-A177-3AD203B41FA5}">
+                      <a16:colId xmlns:a16="http://schemas.microsoft.com/office/drawing/2014/main" val="20001"/>
+                    </a:ext>
+                  </a:extLst>
+                </a:gridCol>
+                <a:gridCol w="1621878">
+                  <a:extLst>
+                    <a:ext uri="{9D8B030D-6E8A-4147-A177-3AD203B41FA5}">
+                      <a16:colId xmlns:a16="http://schemas.microsoft.com/office/drawing/2014/main" val="20002"/>
+                    </a:ext>
+                  </a:extLst>
+                </a:gridCol>
+              </a:tblGrid>
+              <a:tr h="0">
+                <a:tc>
+                  <a:txBody>
+                    <a:bodyPr/>
+                    <a:lstStyle/>
+                    <a:p>
+                      <a:pPr marL="0" lvl="0" indent="0" algn="l" rtl="0">
+                        <a:spcBef>
+                          <a:spcPts val="0"/>
+                        </a:spcBef>
+                        <a:spcAft>
+                          <a:spcPts val="0"/>
+                        </a:spcAft>
+                        <a:buNone/>
+                      </a:pPr>
+                      <a:endParaRPr sz="1400" dirty="0"/>
+                    </a:p>
+                  </a:txBody>
+                  <a:tcPr marL="91425" marR="91425" marT="91425" marB="91425">
+                    <a:solidFill>
+                      <a:schemeClr val="accent6">
+                        <a:lumMod val="20000"/>
+                        <a:lumOff val="80000"/>
+                      </a:schemeClr>
+                    </a:solidFill>
+                  </a:tcPr>
+                </a:tc>
+                <a:tc>
+                  <a:txBody>
+                    <a:bodyPr/>
+                    <a:lstStyle/>
+                    <a:p>
+                      <a:pPr marL="0" lvl="0" indent="0" algn="l" rtl="0">
+                        <a:spcBef>
+                          <a:spcPts val="0"/>
+                        </a:spcBef>
+                        <a:spcAft>
+                          <a:spcPts val="0"/>
+                        </a:spcAft>
+                        <a:buNone/>
+                      </a:pPr>
+                      <a:r>
+                        <a:rPr lang="en-US" sz="1400" dirty="0"/>
+                        <a:t>Accept H</a:t>
+                      </a:r>
+                      <a:r>
+                        <a:rPr lang="en-US" sz="1400" baseline="-25000" dirty="0"/>
+                        <a:t>0</a:t>
+                      </a:r>
+                      <a:endParaRPr sz="1400" dirty="0"/>
+                    </a:p>
+                  </a:txBody>
+                  <a:tcPr marL="91425" marR="91425" marT="91425" marB="91425">
+                    <a:solidFill>
+                      <a:schemeClr val="accent6">
+                        <a:lumMod val="20000"/>
+                        <a:lumOff val="80000"/>
+                      </a:schemeClr>
+                    </a:solidFill>
+                  </a:tcPr>
+                </a:tc>
+                <a:tc>
+                  <a:txBody>
+                    <a:bodyPr/>
+                    <a:lstStyle/>
+                    <a:p>
+                      <a:pPr marL="0" lvl="0" indent="0" algn="l" rtl="0">
+                        <a:spcBef>
+                          <a:spcPts val="0"/>
+                        </a:spcBef>
+                        <a:spcAft>
+                          <a:spcPts val="0"/>
+                        </a:spcAft>
+                        <a:buClr>
+                          <a:schemeClr val="dk1"/>
+                        </a:buClr>
+                        <a:buSzPts val="1100"/>
+                        <a:buFont typeface="Arial"/>
+                        <a:buNone/>
+                      </a:pPr>
+                      <a:r>
+                        <a:rPr lang="en-US" sz="1400" dirty="0">
+                          <a:solidFill>
+                            <a:schemeClr val="dk1"/>
+                          </a:solidFill>
+                        </a:rPr>
+                        <a:t>Reject </a:t>
+                      </a:r>
+                      <a:r>
+                        <a:rPr lang="en-US" sz="1400" dirty="0"/>
+                        <a:t>H</a:t>
+                      </a:r>
+                      <a:r>
+                        <a:rPr lang="en-US" sz="1400" baseline="-25000" dirty="0"/>
+                        <a:t>0</a:t>
+                      </a:r>
+                      <a:endParaRPr sz="1400" dirty="0"/>
+                    </a:p>
+                  </a:txBody>
+                  <a:tcPr marL="91425" marR="91425" marT="91425" marB="91425">
+                    <a:solidFill>
+                      <a:schemeClr val="accent6">
+                        <a:lumMod val="20000"/>
+                        <a:lumOff val="80000"/>
+                      </a:schemeClr>
+                    </a:solidFill>
+                  </a:tcPr>
+                </a:tc>
+                <a:extLst>
+                  <a:ext uri="{0D108BD9-81ED-4DB2-BD59-A6C34878D82A}">
+                    <a16:rowId xmlns:a16="http://schemas.microsoft.com/office/drawing/2014/main" val="10000"/>
+                  </a:ext>
+                </a:extLst>
+              </a:tr>
+              <a:tr h="535495">
+                <a:tc>
+                  <a:txBody>
+                    <a:bodyPr/>
+                    <a:lstStyle/>
+                    <a:p>
+                      <a:pPr marL="0" lvl="0" indent="0" algn="l" rtl="0">
+                        <a:spcBef>
+                          <a:spcPts val="0"/>
+                        </a:spcBef>
+                        <a:spcAft>
+                          <a:spcPts val="0"/>
+                        </a:spcAft>
+                        <a:buNone/>
+                      </a:pPr>
+                      <a:r>
+                        <a:rPr lang="en-US" sz="1400" dirty="0"/>
+                        <a:t>H</a:t>
+                      </a:r>
+                      <a:r>
+                        <a:rPr lang="en-US" sz="1400" baseline="-25000" dirty="0"/>
+                        <a:t>0</a:t>
+                      </a:r>
+                      <a:r>
+                        <a:rPr lang="en-US" sz="1400" dirty="0"/>
+                        <a:t> is True</a:t>
+                      </a:r>
+                      <a:endParaRPr sz="1400" dirty="0"/>
+                    </a:p>
+                  </a:txBody>
+                  <a:tcPr marL="91425" marR="91425" marT="91425" marB="91425">
+                    <a:solidFill>
+                      <a:schemeClr val="accent6">
+                        <a:lumMod val="20000"/>
+                        <a:lumOff val="80000"/>
+                      </a:schemeClr>
+                    </a:solidFill>
+                  </a:tcPr>
+                </a:tc>
+                <a:tc>
+                  <a:txBody>
+                    <a:bodyPr/>
+                    <a:lstStyle/>
+                    <a:p>
+                      <a:pPr marL="0" lvl="0" indent="0" algn="l" rtl="0">
+                        <a:spcBef>
+                          <a:spcPts val="0"/>
+                        </a:spcBef>
+                        <a:spcAft>
+                          <a:spcPts val="0"/>
+                        </a:spcAft>
+                        <a:buNone/>
+                      </a:pPr>
+                      <a:r>
+                        <a:rPr lang="en-US" sz="1400" dirty="0"/>
+                        <a:t>Correct</a:t>
+                      </a:r>
+                      <a:endParaRPr sz="1400" dirty="0"/>
+                    </a:p>
+                  </a:txBody>
+                  <a:tcPr marL="91425" marR="91425" marT="91425" marB="91425">
+                    <a:solidFill>
+                      <a:srgbClr val="C9DAF8"/>
+                    </a:solidFill>
+                  </a:tcPr>
+                </a:tc>
+                <a:tc>
+                  <a:txBody>
+                    <a:bodyPr/>
+                    <a:lstStyle/>
+                    <a:p>
+                      <a:pPr marL="0" lvl="0" indent="0" algn="l" rtl="0">
+                        <a:spcBef>
+                          <a:spcPts val="0"/>
+                        </a:spcBef>
+                        <a:spcAft>
+                          <a:spcPts val="0"/>
+                        </a:spcAft>
+                        <a:buNone/>
+                      </a:pPr>
+                      <a:r>
+                        <a:rPr lang="en-US" sz="1400" b="1" dirty="0">
+                          <a:solidFill>
+                            <a:srgbClr val="FF0000"/>
+                          </a:solidFill>
+                        </a:rPr>
+                        <a:t>type I error</a:t>
+                      </a:r>
+                    </a:p>
+                    <a:p>
+                      <a:pPr marL="0" lvl="0" indent="0" algn="l" rtl="0">
+                        <a:spcBef>
+                          <a:spcPts val="0"/>
+                        </a:spcBef>
+                        <a:spcAft>
+                          <a:spcPts val="0"/>
+                        </a:spcAft>
+                        <a:buNone/>
+                      </a:pPr>
+                      <a:r>
+                        <a:rPr lang="en-US" sz="1400" b="1" dirty="0">
+                          <a:solidFill>
+                            <a:srgbClr val="FF0000"/>
+                          </a:solidFill>
+                        </a:rPr>
+                        <a:t>(rejected True)</a:t>
+                      </a:r>
+                      <a:endParaRPr sz="1400" b="1" dirty="0">
+                        <a:solidFill>
+                          <a:srgbClr val="FF0000"/>
+                        </a:solidFill>
+                      </a:endParaRPr>
+                    </a:p>
+                  </a:txBody>
+                  <a:tcPr marL="91425" marR="91425" marT="91425" marB="91425"/>
+                </a:tc>
+                <a:extLst>
+                  <a:ext uri="{0D108BD9-81ED-4DB2-BD59-A6C34878D82A}">
+                    <a16:rowId xmlns:a16="http://schemas.microsoft.com/office/drawing/2014/main" val="10001"/>
+                  </a:ext>
+                </a:extLst>
+              </a:tr>
+              <a:tr h="535495">
+                <a:tc>
+                  <a:txBody>
+                    <a:bodyPr/>
+                    <a:lstStyle/>
+                    <a:p>
+                      <a:pPr marL="0" lvl="0" indent="0" algn="l" rtl="0">
+                        <a:spcBef>
+                          <a:spcPts val="0"/>
+                        </a:spcBef>
+                        <a:spcAft>
+                          <a:spcPts val="0"/>
+                        </a:spcAft>
+                        <a:buNone/>
+                      </a:pPr>
+                      <a:r>
+                        <a:rPr lang="en-US" sz="1400" dirty="0"/>
+                        <a:t>H</a:t>
+                      </a:r>
+                      <a:r>
+                        <a:rPr lang="en-US" sz="1400" baseline="-25000" dirty="0"/>
+                        <a:t>0</a:t>
+                      </a:r>
+                      <a:r>
+                        <a:rPr lang="en-US" sz="1400" dirty="0"/>
+                        <a:t> is False</a:t>
+                      </a:r>
+                      <a:endParaRPr sz="1400" dirty="0"/>
+                    </a:p>
+                  </a:txBody>
+                  <a:tcPr marL="91425" marR="91425" marT="91425" marB="91425">
+                    <a:solidFill>
+                      <a:schemeClr val="accent6">
+                        <a:lumMod val="20000"/>
+                        <a:lumOff val="80000"/>
+                      </a:schemeClr>
+                    </a:solidFill>
+                  </a:tcPr>
+                </a:tc>
+                <a:tc>
+                  <a:txBody>
+                    <a:bodyPr/>
+                    <a:lstStyle/>
+                    <a:p>
+                      <a:pPr marL="0" lvl="0" indent="0" algn="l" rtl="0">
+                        <a:spcBef>
+                          <a:spcPts val="0"/>
+                        </a:spcBef>
+                        <a:spcAft>
+                          <a:spcPts val="0"/>
+                        </a:spcAft>
+                        <a:buNone/>
+                      </a:pPr>
+                      <a:r>
+                        <a:rPr lang="en-US" sz="1400" b="1" dirty="0">
+                          <a:solidFill>
+                            <a:srgbClr val="FF0000"/>
+                          </a:solidFill>
+                        </a:rPr>
+                        <a:t>type II error</a:t>
+                      </a:r>
+                    </a:p>
+                    <a:p>
+                      <a:pPr marL="0" lvl="0" indent="0" algn="l" rtl="0">
+                        <a:spcBef>
+                          <a:spcPts val="0"/>
+                        </a:spcBef>
+                        <a:spcAft>
+                          <a:spcPts val="0"/>
+                        </a:spcAft>
+                        <a:buNone/>
+                      </a:pPr>
+                      <a:r>
+                        <a:rPr lang="en-US" sz="1400" b="1" dirty="0">
+                          <a:solidFill>
+                            <a:srgbClr val="FF0000"/>
+                          </a:solidFill>
+                        </a:rPr>
+                        <a:t>(accepted False)</a:t>
+                      </a:r>
+                      <a:endParaRPr sz="1400" b="1" dirty="0">
+                        <a:solidFill>
+                          <a:srgbClr val="FF0000"/>
+                        </a:solidFill>
+                      </a:endParaRPr>
+                    </a:p>
+                  </a:txBody>
+                  <a:tcPr marL="91425" marR="91425" marT="91425" marB="91425"/>
+                </a:tc>
+                <a:tc>
+                  <a:txBody>
+                    <a:bodyPr/>
+                    <a:lstStyle/>
+                    <a:p>
+                      <a:pPr marL="0" lvl="0" indent="0" algn="l" rtl="0">
+                        <a:spcBef>
+                          <a:spcPts val="0"/>
+                        </a:spcBef>
+                        <a:spcAft>
+                          <a:spcPts val="0"/>
+                        </a:spcAft>
+                        <a:buNone/>
+                      </a:pPr>
+                      <a:r>
+                        <a:rPr lang="en-US" sz="1400" dirty="0"/>
+                        <a:t>Correct </a:t>
+                      </a:r>
+                      <a:endParaRPr sz="1400" dirty="0"/>
+                    </a:p>
+                  </a:txBody>
+                  <a:tcPr marL="91425" marR="91425" marT="91425" marB="91425">
+                    <a:solidFill>
+                      <a:srgbClr val="C9DAF8"/>
+                    </a:solidFill>
+                  </a:tcPr>
+                </a:tc>
+                <a:extLst>
+                  <a:ext uri="{0D108BD9-81ED-4DB2-BD59-A6C34878D82A}">
+                    <a16:rowId xmlns:a16="http://schemas.microsoft.com/office/drawing/2014/main" val="10002"/>
+                  </a:ext>
+                </a:extLst>
+              </a:tr>
+            </a:tbl>
+          </a:graphicData>
+        </a:graphic>
+      </p:graphicFrame>
+      <p:sp>
+        <p:nvSpPr>
+          <p:cNvPr id="3" name="TextBox 2">
+            <a:extLst>
+              <a:ext uri="{FF2B5EF4-FFF2-40B4-BE49-F238E27FC236}">
+                <a16:creationId xmlns:a16="http://schemas.microsoft.com/office/drawing/2014/main" id="{B3B1CF2C-65C5-4B39-9DC6-0815B8F51635}"/>
+              </a:ext>
+            </a:extLst>
+          </p:cNvPr>
+          <p:cNvSpPr txBox="1"/>
+          <p:nvPr/>
+        </p:nvSpPr>
+        <p:spPr>
+          <a:xfrm>
+            <a:off x="232587" y="3809990"/>
+            <a:ext cx="5973341" cy="2400657"/>
+          </a:xfrm>
+          <a:prstGeom prst="rect">
+            <a:avLst/>
+          </a:prstGeom>
+          <a:solidFill>
+            <a:schemeClr val="accent4">
+              <a:lumMod val="20000"/>
+              <a:lumOff val="80000"/>
+            </a:schemeClr>
+          </a:solidFill>
+        </p:spPr>
+        <p:txBody>
+          <a:bodyPr wrap="square" rtlCol="0">
+            <a:spAutoFit/>
+          </a:bodyPr>
+          <a:lstStyle/>
+          <a:p>
+            <a:r>
+              <a:rPr lang="en-US" sz="1800" b="1">
+                <a:solidFill>
+                  <a:srgbClr val="FF0000"/>
+                </a:solidFill>
+              </a:rPr>
+              <a:t>The type of error depends on the null hypothesis</a:t>
+            </a:r>
+          </a:p>
+          <a:p>
+            <a:endParaRPr lang="en-US" sz="1200">
+              <a:latin typeface="Menlo" panose="020B0609030804020204" pitchFamily="49" charset="0"/>
+              <a:ea typeface="Menlo" panose="020B0609030804020204" pitchFamily="49" charset="0"/>
+              <a:cs typeface="Menlo" panose="020B0609030804020204" pitchFamily="49" charset="0"/>
+            </a:endParaRPr>
+          </a:p>
+          <a:p>
+            <a:r>
+              <a:rPr lang="en-US" sz="1200">
+                <a:latin typeface="Menlo" panose="020B0609030804020204" pitchFamily="49" charset="0"/>
+                <a:ea typeface="Menlo" panose="020B0609030804020204" pitchFamily="49" charset="0"/>
+                <a:cs typeface="Menlo" panose="020B0609030804020204" pitchFamily="49" charset="0"/>
+              </a:rPr>
+              <a:t>Example: COVID test.</a:t>
+            </a:r>
+          </a:p>
+          <a:p>
+            <a:endParaRPr lang="en-US" sz="1200">
+              <a:latin typeface="Menlo" panose="020B0609030804020204" pitchFamily="49" charset="0"/>
+              <a:ea typeface="Menlo" panose="020B0609030804020204" pitchFamily="49" charset="0"/>
+              <a:cs typeface="Menlo" panose="020B0609030804020204" pitchFamily="49" charset="0"/>
+            </a:endParaRPr>
+          </a:p>
+          <a:p>
+            <a:r>
+              <a:rPr lang="en-US" sz="1200" b="1">
+                <a:solidFill>
+                  <a:srgbClr val="00B050"/>
+                </a:solidFill>
+                <a:latin typeface="Menlo" panose="020B0609030804020204" pitchFamily="49" charset="0"/>
+                <a:ea typeface="Menlo" panose="020B0609030804020204" pitchFamily="49" charset="0"/>
+                <a:cs typeface="Menlo" panose="020B0609030804020204" pitchFamily="49" charset="0"/>
+              </a:rPr>
+              <a:t>Null Hypothesis 1: person has COVID.</a:t>
+            </a:r>
+          </a:p>
+          <a:p>
+            <a:r>
+              <a:rPr lang="en-US" sz="1200" b="1">
+                <a:solidFill>
+                  <a:srgbClr val="FF0000"/>
+                </a:solidFill>
+                <a:latin typeface="Menlo" panose="020B0609030804020204" pitchFamily="49" charset="0"/>
+                <a:ea typeface="Menlo" panose="020B0609030804020204" pitchFamily="49" charset="0"/>
+                <a:cs typeface="Menlo" panose="020B0609030804020204" pitchFamily="49" charset="0"/>
+              </a:rPr>
+              <a:t>Error Type 1</a:t>
+            </a:r>
+            <a:r>
+              <a:rPr lang="en-US" sz="1200">
+                <a:latin typeface="Menlo" panose="020B0609030804020204" pitchFamily="49" charset="0"/>
+                <a:ea typeface="Menlo" panose="020B0609030804020204" pitchFamily="49" charset="0"/>
+                <a:cs typeface="Menlo" panose="020B0609030804020204" pitchFamily="49" charset="0"/>
+              </a:rPr>
+              <a:t> is when the test says "</a:t>
+            </a:r>
+            <a:r>
+              <a:rPr lang="en-US" sz="1200" b="1">
+                <a:solidFill>
+                  <a:srgbClr val="FF0000"/>
+                </a:solidFill>
+                <a:latin typeface="Menlo" panose="020B0609030804020204" pitchFamily="49" charset="0"/>
+                <a:ea typeface="Menlo" panose="020B0609030804020204" pitchFamily="49" charset="0"/>
+                <a:cs typeface="Menlo" panose="020B0609030804020204" pitchFamily="49" charset="0"/>
+              </a:rPr>
+              <a:t>Healthy</a:t>
+            </a:r>
+            <a:r>
+              <a:rPr lang="en-US" sz="1200">
+                <a:latin typeface="Menlo" panose="020B0609030804020204" pitchFamily="49" charset="0"/>
+                <a:ea typeface="Menlo" panose="020B0609030804020204" pitchFamily="49" charset="0"/>
+                <a:cs typeface="Menlo" panose="020B0609030804020204" pitchFamily="49" charset="0"/>
+              </a:rPr>
+              <a:t>" on a sick person</a:t>
+            </a:r>
+          </a:p>
+          <a:p>
+            <a:r>
+              <a:rPr lang="en-US" sz="1200">
+                <a:latin typeface="Menlo" panose="020B0609030804020204" pitchFamily="49" charset="0"/>
+                <a:ea typeface="Menlo" panose="020B0609030804020204" pitchFamily="49" charset="0"/>
+                <a:cs typeface="Menlo" panose="020B0609030804020204" pitchFamily="49" charset="0"/>
+              </a:rPr>
+              <a:t>Error Type 2 is when the test says "Sick" on a healthy person</a:t>
+            </a:r>
+          </a:p>
+          <a:p>
+            <a:endParaRPr lang="en-US" sz="1200">
+              <a:latin typeface="Menlo" panose="020B0609030804020204" pitchFamily="49" charset="0"/>
+              <a:ea typeface="Menlo" panose="020B0609030804020204" pitchFamily="49" charset="0"/>
+              <a:cs typeface="Menlo" panose="020B0609030804020204" pitchFamily="49" charset="0"/>
+            </a:endParaRPr>
+          </a:p>
+          <a:p>
+            <a:endParaRPr lang="en-US" sz="1200">
+              <a:latin typeface="Menlo" panose="020B0609030804020204" pitchFamily="49" charset="0"/>
+              <a:ea typeface="Menlo" panose="020B0609030804020204" pitchFamily="49" charset="0"/>
+              <a:cs typeface="Menlo" panose="020B0609030804020204" pitchFamily="49" charset="0"/>
+            </a:endParaRPr>
+          </a:p>
+          <a:p>
+            <a:r>
+              <a:rPr lang="en-US" sz="1200" b="1">
+                <a:solidFill>
+                  <a:srgbClr val="00B050"/>
+                </a:solidFill>
+                <a:latin typeface="Menlo" panose="020B0609030804020204" pitchFamily="49" charset="0"/>
+                <a:ea typeface="Menlo" panose="020B0609030804020204" pitchFamily="49" charset="0"/>
+                <a:cs typeface="Menlo" panose="020B0609030804020204" pitchFamily="49" charset="0"/>
+              </a:rPr>
+              <a:t>Null Hypothesis 2: person is Healthy.</a:t>
+            </a:r>
+          </a:p>
+          <a:p>
+            <a:r>
+              <a:rPr lang="en-US" sz="1200" b="1">
+                <a:solidFill>
+                  <a:srgbClr val="FF0000"/>
+                </a:solidFill>
+                <a:latin typeface="Menlo" panose="020B0609030804020204" pitchFamily="49" charset="0"/>
+                <a:ea typeface="Menlo" panose="020B0609030804020204" pitchFamily="49" charset="0"/>
+                <a:cs typeface="Menlo" panose="020B0609030804020204" pitchFamily="49" charset="0"/>
+              </a:rPr>
+              <a:t>Error Type 1</a:t>
+            </a:r>
+            <a:r>
+              <a:rPr lang="en-US" sz="1200">
+                <a:latin typeface="Menlo" panose="020B0609030804020204" pitchFamily="49" charset="0"/>
+                <a:ea typeface="Menlo" panose="020B0609030804020204" pitchFamily="49" charset="0"/>
+                <a:cs typeface="Menlo" panose="020B0609030804020204" pitchFamily="49" charset="0"/>
+              </a:rPr>
+              <a:t> is when the test says "</a:t>
+            </a:r>
+            <a:r>
+              <a:rPr lang="en-US" sz="1200" b="1">
+                <a:solidFill>
+                  <a:srgbClr val="FF0000"/>
+                </a:solidFill>
+                <a:latin typeface="Menlo" panose="020B0609030804020204" pitchFamily="49" charset="0"/>
+                <a:ea typeface="Menlo" panose="020B0609030804020204" pitchFamily="49" charset="0"/>
+                <a:cs typeface="Menlo" panose="020B0609030804020204" pitchFamily="49" charset="0"/>
+              </a:rPr>
+              <a:t>Sick</a:t>
+            </a:r>
+            <a:r>
+              <a:rPr lang="en-US" sz="1200">
+                <a:latin typeface="Menlo" panose="020B0609030804020204" pitchFamily="49" charset="0"/>
+                <a:ea typeface="Menlo" panose="020B0609030804020204" pitchFamily="49" charset="0"/>
+                <a:cs typeface="Menlo" panose="020B0609030804020204" pitchFamily="49" charset="0"/>
+              </a:rPr>
+              <a:t>" on a healthy person</a:t>
+            </a:r>
+          </a:p>
+          <a:p>
+            <a:r>
+              <a:rPr lang="en-US" sz="1200">
+                <a:latin typeface="Menlo" panose="020B0609030804020204" pitchFamily="49" charset="0"/>
+                <a:ea typeface="Menlo" panose="020B0609030804020204" pitchFamily="49" charset="0"/>
+                <a:cs typeface="Menlo" panose="020B0609030804020204" pitchFamily="49" charset="0"/>
+              </a:rPr>
+              <a:t>Error Type 2 is when the test says "Healthy" on a sick person</a:t>
+            </a:r>
+          </a:p>
+        </p:txBody>
+      </p:sp>
+      <p:sp>
+        <p:nvSpPr>
+          <p:cNvPr id="8" name="TextBox 7">
+            <a:extLst>
+              <a:ext uri="{FF2B5EF4-FFF2-40B4-BE49-F238E27FC236}">
+                <a16:creationId xmlns:a16="http://schemas.microsoft.com/office/drawing/2014/main" id="{03F9A077-BA4E-1554-A75D-5EF94BAF191C}"/>
+              </a:ext>
+            </a:extLst>
+          </p:cNvPr>
+          <p:cNvSpPr txBox="1"/>
+          <p:nvPr/>
+        </p:nvSpPr>
+        <p:spPr>
+          <a:xfrm>
+            <a:off x="6490740" y="3872439"/>
+            <a:ext cx="5591331" cy="2308324"/>
+          </a:xfrm>
+          <a:prstGeom prst="rect">
+            <a:avLst/>
+          </a:prstGeom>
+          <a:solidFill>
+            <a:schemeClr val="accent4">
+              <a:lumMod val="20000"/>
+              <a:lumOff val="80000"/>
+            </a:schemeClr>
+          </a:solidFill>
+        </p:spPr>
+        <p:txBody>
+          <a:bodyPr wrap="square" rtlCol="0">
+            <a:spAutoFit/>
+          </a:bodyPr>
+          <a:lstStyle/>
+          <a:p>
+            <a:r>
+              <a:rPr lang="en-US" sz="1800" b="1">
+                <a:solidFill>
+                  <a:srgbClr val="FF0000"/>
+                </a:solidFill>
+              </a:rPr>
+              <a:t>Choosing null hypothesis:</a:t>
+            </a:r>
+          </a:p>
+          <a:p>
+            <a:endParaRPr lang="en-US"/>
+          </a:p>
+          <a:p>
+            <a:r>
+              <a:rPr lang="en-US"/>
+              <a:t>guilty / innocent: the person is presumed innocent until proven guilty. </a:t>
+            </a:r>
+          </a:p>
+          <a:p>
+            <a:r>
+              <a:rPr lang="en-US"/>
+              <a:t>Null Hypothesis = "Innocent"</a:t>
+            </a:r>
+          </a:p>
+          <a:p>
+            <a:endParaRPr lang="en-US"/>
+          </a:p>
+          <a:p>
+            <a:r>
+              <a:rPr lang="en-US"/>
+              <a:t>sick / healthy: the person is presumed healthy. </a:t>
+            </a:r>
+          </a:p>
+          <a:p>
+            <a:r>
+              <a:rPr lang="en-US"/>
+              <a:t>Null Hypothesis = "Healthy"</a:t>
+            </a:r>
+          </a:p>
+          <a:p>
+            <a:endParaRPr lang="en-US"/>
+          </a:p>
+          <a:p>
+            <a:r>
+              <a:rPr lang="en-US"/>
+              <a:t>airplaine / noise: the signals are mostly noise.</a:t>
+            </a:r>
+          </a:p>
+          <a:p>
+            <a:r>
+              <a:rPr lang="en-US"/>
+              <a:t>Null Hypothesis = "Noise"</a:t>
+            </a:r>
+          </a:p>
+        </p:txBody>
+      </p:sp>
+    </p:spTree>
+    <p:extLst>
+      <p:ext uri="{BB962C8B-B14F-4D97-AF65-F5344CB8AC3E}">
+        <p14:creationId xmlns:p14="http://schemas.microsoft.com/office/powerpoint/2010/main" val="895390506"/>
+      </p:ext>
+    </p:extLst>
+  </p:cSld>
+  <p:clrMapOvr>
+    <a:masterClrMapping/>
+  </p:clrMapOvr>
+</p:sld>
+</file>
+
+<file path=ppt/slides/slide3.xml><?xml version="1.0" encoding="utf-8"?>
 <p:sld xmlns:a="http://schemas.openxmlformats.org/drawingml/2006/main" xmlns:r="http://schemas.openxmlformats.org/officeDocument/2006/relationships" xmlns:p="http://schemas.openxmlformats.org/presentationml/2006/main">
   <p:cSld>
     <p:spTree>
@@ -21713,7 +23773,7 @@
 </p:sld>
 </file>
 
-<file path=ppt/slides/slide3.xml><?xml version="1.0" encoding="utf-8"?>
+<file path=ppt/slides/slide4.xml><?xml version="1.0" encoding="utf-8"?>
 <p:sld xmlns:a="http://schemas.openxmlformats.org/drawingml/2006/main" xmlns:r="http://schemas.openxmlformats.org/officeDocument/2006/relationships" xmlns:p="http://schemas.openxmlformats.org/presentationml/2006/main">
   <p:cSld>
     <p:spTree>
@@ -22561,7 +24621,7 @@
 </p:sld>
 </file>
 
-<file path=ppt/slides/slide4.xml><?xml version="1.0" encoding="utf-8"?>
+<file path=ppt/slides/slide5.xml><?xml version="1.0" encoding="utf-8"?>
 <p:sld xmlns:a="http://schemas.openxmlformats.org/drawingml/2006/main" xmlns:r="http://schemas.openxmlformats.org/officeDocument/2006/relationships" xmlns:p="http://schemas.openxmlformats.org/presentationml/2006/main">
   <p:cSld>
     <p:spTree>
@@ -24153,7 +26213,7 @@
 </p:sld>
 </file>
 
-<file path=ppt/slides/slide5.xml><?xml version="1.0" encoding="utf-8"?>
+<file path=ppt/slides/slide6.xml><?xml version="1.0" encoding="utf-8"?>
 <p:sld xmlns:a="http://schemas.openxmlformats.org/drawingml/2006/main" xmlns:r="http://schemas.openxmlformats.org/officeDocument/2006/relationships" xmlns:p="http://schemas.openxmlformats.org/presentationml/2006/main">
   <p:cSld>
     <p:spTree>
@@ -24486,7 +26546,7 @@
 </p:sld>
 </file>
 
-<file path=ppt/slides/slide6.xml><?xml version="1.0" encoding="utf-8"?>
+<file path=ppt/slides/slide7.xml><?xml version="1.0" encoding="utf-8"?>
 <p:sld xmlns:a="http://schemas.openxmlformats.org/drawingml/2006/main" xmlns:r="http://schemas.openxmlformats.org/officeDocument/2006/relationships" xmlns:p="http://schemas.openxmlformats.org/presentationml/2006/main">
   <p:cSld>
     <p:spTree>
@@ -25423,7 +27483,7 @@
 </p:sld>
 </file>
 
-<file path=ppt/slides/slide7.xml><?xml version="1.0" encoding="utf-8"?>
+<file path=ppt/slides/slide8.xml><?xml version="1.0" encoding="utf-8"?>
 <p:sld xmlns:a="http://schemas.openxmlformats.org/drawingml/2006/main" xmlns:r="http://schemas.openxmlformats.org/officeDocument/2006/relationships" xmlns:p="http://schemas.openxmlformats.org/presentationml/2006/main">
   <p:cSld>
     <p:spTree>
@@ -27100,7 +29160,7 @@
 </p:sld>
 </file>
 
-<file path=ppt/slides/slide8.xml><?xml version="1.0" encoding="utf-8"?>
+<file path=ppt/slides/slide9.xml><?xml version="1.0" encoding="utf-8"?>
 <p:sld xmlns:a="http://schemas.openxmlformats.org/drawingml/2006/main" xmlns:r="http://schemas.openxmlformats.org/officeDocument/2006/relationships" xmlns:p="http://schemas.openxmlformats.org/presentationml/2006/main">
   <p:cSld>
     <p:spTree>
@@ -27828,954 +29888,6 @@
     <p:extLst>
       <p:ext uri="{BB962C8B-B14F-4D97-AF65-F5344CB8AC3E}">
         <p14:creationId xmlns:p14="http://schemas.microsoft.com/office/powerpoint/2010/main" val="180183310"/>
-      </p:ext>
-    </p:extLst>
-  </p:cSld>
-  <p:clrMapOvr>
-    <a:masterClrMapping/>
-  </p:clrMapOvr>
-</p:sld>
-</file>
-
-<file path=ppt/slides/slide9.xml><?xml version="1.0" encoding="utf-8"?>
-<p:sld xmlns:a="http://schemas.openxmlformats.org/drawingml/2006/main" xmlns:r="http://schemas.openxmlformats.org/officeDocument/2006/relationships" xmlns:p="http://schemas.openxmlformats.org/presentationml/2006/main">
-  <p:cSld>
-    <p:spTree>
-      <p:nvGrpSpPr>
-        <p:cNvPr id="1" name=""/>
-        <p:cNvGrpSpPr/>
-        <p:nvPr/>
-      </p:nvGrpSpPr>
-      <p:grpSpPr>
-        <a:xfrm>
-          <a:off x="0" y="0"/>
-          <a:ext cx="0" cy="0"/>
-          <a:chOff x="0" y="0"/>
-          <a:chExt cx="0" cy="0"/>
-        </a:xfrm>
-      </p:grpSpPr>
-      <p:sp>
-        <p:nvSpPr>
-          <p:cNvPr id="4" name="Google Shape;130;p18">
-            <a:extLst>
-              <a:ext uri="{FF2B5EF4-FFF2-40B4-BE49-F238E27FC236}">
-                <a16:creationId xmlns:a16="http://schemas.microsoft.com/office/drawing/2014/main" id="{6F73DBF3-377D-DC49-AED2-EC061EC41127}"/>
-              </a:ext>
-            </a:extLst>
-          </p:cNvPr>
-          <p:cNvSpPr txBox="1"/>
-          <p:nvPr/>
-        </p:nvSpPr>
-        <p:spPr>
-          <a:xfrm>
-            <a:off x="122583" y="129208"/>
-            <a:ext cx="6172200" cy="5179771"/>
-          </a:xfrm>
-          <a:prstGeom prst="rect">
-            <a:avLst/>
-          </a:prstGeom>
-          <a:noFill/>
-          <a:ln>
-            <a:noFill/>
-          </a:ln>
-        </p:spPr>
-        <p:txBody>
-          <a:bodyPr spcFirstLastPara="1" wrap="square" lIns="91425" tIns="91425" rIns="91425" bIns="91425" anchor="t" anchorCtr="0">
-            <a:noAutofit/>
-          </a:bodyPr>
-          <a:lstStyle/>
-          <a:p>
-            <a:r>
-              <a:rPr lang="en-US" sz="2800" b="1" dirty="0">
-                <a:latin typeface="Calibri"/>
-                <a:ea typeface="Calibri"/>
-                <a:cs typeface="Calibri"/>
-                <a:sym typeface="Calibri"/>
-              </a:rPr>
-              <a:t>Checking whether a coin is fair - </a:t>
-            </a:r>
-            <a:r>
-              <a:rPr lang="en-US" sz="2800" b="1" i="1" dirty="0">
-                <a:solidFill>
-                  <a:srgbClr val="222222"/>
-                </a:solidFill>
-                <a:highlight>
-                  <a:srgbClr val="FFFFFF"/>
-                </a:highlight>
-                <a:latin typeface="Times New Roman"/>
-                <a:ea typeface="Times New Roman"/>
-                <a:cs typeface="Times New Roman"/>
-                <a:sym typeface="Times New Roman"/>
-              </a:rPr>
-              <a:t>χ</a:t>
-            </a:r>
-            <a:r>
-              <a:rPr lang="en-US" sz="2800" b="1" baseline="30000" dirty="0">
-                <a:solidFill>
-                  <a:srgbClr val="222222"/>
-                </a:solidFill>
-                <a:highlight>
-                  <a:srgbClr val="FFFFFF"/>
-                </a:highlight>
-                <a:latin typeface="Times New Roman"/>
-                <a:ea typeface="Times New Roman"/>
-                <a:cs typeface="Times New Roman"/>
-                <a:sym typeface="Times New Roman"/>
-              </a:rPr>
-              <a:t>2</a:t>
-            </a:r>
-            <a:r>
-              <a:rPr lang="en-US" sz="2800" b="1" dirty="0">
-                <a:latin typeface="Calibri"/>
-                <a:ea typeface="Calibri"/>
-                <a:cs typeface="Calibri"/>
-                <a:sym typeface="Calibri"/>
-              </a:rPr>
-              <a:t> test</a:t>
-            </a:r>
-            <a:br>
-              <a:rPr lang="en-US" sz="1800" dirty="0">
-                <a:latin typeface="Calibri"/>
-                <a:ea typeface="Calibri"/>
-                <a:cs typeface="Calibri"/>
-                <a:sym typeface="Calibri"/>
-              </a:rPr>
-            </a:br>
-            <a:br>
-              <a:rPr lang="en-US" sz="1300" dirty="0">
-                <a:latin typeface="Calibri"/>
-                <a:ea typeface="Calibri"/>
-                <a:cs typeface="Calibri"/>
-                <a:sym typeface="Calibri"/>
-              </a:rPr>
-            </a:br>
-            <a:r>
-              <a:rPr lang="en-US" sz="1300" b="1" u="sng" dirty="0">
-                <a:latin typeface="Calibri"/>
-                <a:ea typeface="Calibri"/>
-                <a:cs typeface="Calibri"/>
-                <a:sym typeface="Calibri"/>
-              </a:rPr>
-              <a:t>Problem:</a:t>
-            </a:r>
-            <a:endParaRPr sz="1300" b="1" u="sng" dirty="0">
-              <a:latin typeface="Calibri"/>
-              <a:ea typeface="Calibri"/>
-              <a:cs typeface="Calibri"/>
-              <a:sym typeface="Calibri"/>
-            </a:endParaRPr>
-          </a:p>
-          <a:p>
-            <a:pPr marL="0" lvl="0" indent="0" algn="l" rtl="0">
-              <a:spcBef>
-                <a:spcPts val="0"/>
-              </a:spcBef>
-              <a:spcAft>
-                <a:spcPts val="0"/>
-              </a:spcAft>
-              <a:buNone/>
-            </a:pPr>
-            <a:r>
-              <a:rPr lang="en-US" sz="1300" dirty="0">
-                <a:latin typeface="Calibri"/>
-                <a:ea typeface="Calibri"/>
-                <a:cs typeface="Calibri"/>
-                <a:sym typeface="Calibri"/>
-              </a:rPr>
-              <a:t>We want to test a null hypothesis that the coin is fair.</a:t>
-            </a:r>
-          </a:p>
-          <a:p>
-            <a:pPr marL="0" lvl="0" indent="0" algn="l" rtl="0">
-              <a:spcBef>
-                <a:spcPts val="0"/>
-              </a:spcBef>
-              <a:spcAft>
-                <a:spcPts val="0"/>
-              </a:spcAft>
-              <a:buNone/>
-            </a:pPr>
-            <a:r>
-              <a:rPr lang="en-US" sz="1300" dirty="0">
-                <a:latin typeface="Calibri"/>
-                <a:ea typeface="Calibri"/>
-                <a:cs typeface="Calibri"/>
-                <a:sym typeface="Calibri"/>
-              </a:rPr>
-              <a:t>We flip the coin N times and got H heads.</a:t>
-            </a:r>
-          </a:p>
-          <a:p>
-            <a:pPr marL="0" lvl="0" indent="0" algn="l" rtl="0">
-              <a:spcBef>
-                <a:spcPts val="0"/>
-              </a:spcBef>
-              <a:spcAft>
-                <a:spcPts val="0"/>
-              </a:spcAft>
-              <a:buNone/>
-            </a:pPr>
-            <a:r>
-              <a:rPr lang="en-US" sz="1300" dirty="0">
-                <a:latin typeface="Calibri"/>
-                <a:ea typeface="Calibri"/>
-                <a:cs typeface="Calibri"/>
-                <a:sym typeface="Calibri"/>
-              </a:rPr>
-              <a:t>So number of observed tails T = N-H.</a:t>
-            </a:r>
-          </a:p>
-          <a:p>
-            <a:pPr marL="0" lvl="0" indent="0" algn="l" rtl="0">
-              <a:spcBef>
-                <a:spcPts val="0"/>
-              </a:spcBef>
-              <a:spcAft>
-                <a:spcPts val="0"/>
-              </a:spcAft>
-              <a:buNone/>
-            </a:pPr>
-            <a:endParaRPr lang="en-US" sz="1300" dirty="0">
-              <a:latin typeface="Calibri"/>
-              <a:ea typeface="Calibri"/>
-              <a:cs typeface="Calibri"/>
-              <a:sym typeface="Calibri"/>
-            </a:endParaRPr>
-          </a:p>
-          <a:p>
-            <a:pPr marL="0" lvl="0" indent="0" algn="l" rtl="0">
-              <a:spcBef>
-                <a:spcPts val="0"/>
-              </a:spcBef>
-              <a:spcAft>
-                <a:spcPts val="0"/>
-              </a:spcAft>
-              <a:buNone/>
-            </a:pPr>
-            <a:r>
-              <a:rPr lang="en-US" sz="1300" dirty="0">
-                <a:latin typeface="Calibri"/>
-                <a:ea typeface="Calibri"/>
-                <a:cs typeface="Calibri"/>
-                <a:sym typeface="Calibri"/>
-              </a:rPr>
-              <a:t>Expected values are N/2 for heads and for tails.</a:t>
-            </a:r>
-          </a:p>
-          <a:p>
-            <a:pPr marL="0" lvl="0" indent="0" algn="l" rtl="0">
-              <a:spcBef>
-                <a:spcPts val="0"/>
-              </a:spcBef>
-              <a:spcAft>
-                <a:spcPts val="0"/>
-              </a:spcAft>
-              <a:buNone/>
-            </a:pPr>
-            <a:endParaRPr lang="en-US" sz="1300" dirty="0">
-              <a:latin typeface="Calibri"/>
-              <a:ea typeface="Calibri"/>
-              <a:cs typeface="Calibri"/>
-              <a:sym typeface="Calibri"/>
-            </a:endParaRPr>
-          </a:p>
-          <a:p>
-            <a:pPr lvl="0"/>
-            <a:r>
-              <a:rPr lang="en-US" sz="1300" dirty="0">
-                <a:latin typeface="Calibri"/>
-                <a:ea typeface="Calibri"/>
-                <a:cs typeface="Calibri"/>
-                <a:sym typeface="Calibri"/>
-              </a:rPr>
-              <a:t>Using </a:t>
-            </a:r>
-            <a:r>
-              <a:rPr lang="en-US" b="1" i="1" dirty="0">
-                <a:solidFill>
-                  <a:srgbClr val="222222"/>
-                </a:solidFill>
-                <a:highlight>
-                  <a:srgbClr val="FFFFFF"/>
-                </a:highlight>
-                <a:latin typeface="Times New Roman"/>
-                <a:ea typeface="Times New Roman"/>
-                <a:cs typeface="Times New Roman"/>
-                <a:sym typeface="Times New Roman"/>
-              </a:rPr>
-              <a:t>χ</a:t>
-            </a:r>
-            <a:r>
-              <a:rPr lang="en-US" b="1" baseline="30000" dirty="0">
-                <a:solidFill>
-                  <a:srgbClr val="222222"/>
-                </a:solidFill>
-                <a:highlight>
-                  <a:srgbClr val="FFFFFF"/>
-                </a:highlight>
-                <a:latin typeface="Times New Roman"/>
-                <a:ea typeface="Times New Roman"/>
-                <a:cs typeface="Times New Roman"/>
-                <a:sym typeface="Times New Roman"/>
-              </a:rPr>
-              <a:t>2</a:t>
-            </a:r>
-            <a:r>
-              <a:rPr lang="en-US" b="1" dirty="0">
-                <a:latin typeface="Calibri"/>
-                <a:ea typeface="Calibri"/>
-                <a:cs typeface="Calibri"/>
-                <a:sym typeface="Calibri"/>
-              </a:rPr>
-              <a:t> </a:t>
-            </a:r>
-            <a:r>
-              <a:rPr lang="en-US" sz="1300" dirty="0">
-                <a:latin typeface="Calibri"/>
-                <a:cs typeface="Calibri"/>
-                <a:sym typeface="Calibri"/>
-              </a:rPr>
-              <a:t>goodness of fit test</a:t>
-            </a:r>
-          </a:p>
-          <a:p>
-            <a:pPr lvl="0"/>
-            <a:endParaRPr lang="en-US" sz="1300" dirty="0">
-              <a:latin typeface="Calibri"/>
-              <a:ea typeface="Calibri"/>
-              <a:cs typeface="Calibri"/>
-              <a:sym typeface="Calibri"/>
-            </a:endParaRPr>
-          </a:p>
-          <a:p>
-            <a:pPr lvl="0"/>
-            <a:r>
-              <a:rPr lang="en-US" sz="1300" dirty="0">
-                <a:latin typeface="Calibri"/>
-                <a:ea typeface="Calibri"/>
-                <a:cs typeface="Calibri"/>
-                <a:sym typeface="Calibri"/>
-              </a:rPr>
-              <a:t>X</a:t>
-            </a:r>
-            <a:r>
-              <a:rPr lang="en-US" sz="1300" baseline="30000" dirty="0">
-                <a:latin typeface="Calibri"/>
-                <a:ea typeface="Calibri"/>
-                <a:cs typeface="Calibri"/>
-                <a:sym typeface="Calibri"/>
-              </a:rPr>
-              <a:t>2</a:t>
-            </a:r>
-            <a:r>
-              <a:rPr lang="en-US" sz="1300" dirty="0">
-                <a:latin typeface="Calibri"/>
-                <a:ea typeface="Calibri"/>
-                <a:cs typeface="Calibri"/>
-                <a:sym typeface="Calibri"/>
-              </a:rPr>
-              <a:t> = sum( (observed – expected)</a:t>
-            </a:r>
-            <a:r>
-              <a:rPr lang="en-US" sz="1300" baseline="30000" dirty="0">
-                <a:latin typeface="Calibri"/>
-                <a:ea typeface="Calibri"/>
-                <a:cs typeface="Calibri"/>
-                <a:sym typeface="Calibri"/>
-              </a:rPr>
-              <a:t>2</a:t>
-            </a:r>
-            <a:r>
-              <a:rPr lang="en-US" sz="1300" dirty="0">
-                <a:latin typeface="Calibri"/>
-                <a:ea typeface="Calibri"/>
-                <a:cs typeface="Calibri"/>
-                <a:sym typeface="Calibri"/>
-              </a:rPr>
-              <a:t>/expected) = [ (H– N/2)</a:t>
-            </a:r>
-            <a:r>
-              <a:rPr lang="en-US" sz="1300" baseline="30000" dirty="0">
-                <a:latin typeface="Calibri"/>
-                <a:ea typeface="Calibri"/>
-                <a:cs typeface="Calibri"/>
-                <a:sym typeface="Calibri"/>
-              </a:rPr>
-              <a:t>2</a:t>
-            </a:r>
-            <a:r>
-              <a:rPr lang="en-US" sz="1300" dirty="0">
-                <a:latin typeface="Calibri"/>
-                <a:ea typeface="Calibri"/>
-                <a:cs typeface="Calibri"/>
-                <a:sym typeface="Calibri"/>
-              </a:rPr>
-              <a:t> / (N/2) ] + [ (T – N/2)</a:t>
-            </a:r>
-            <a:r>
-              <a:rPr lang="en-US" sz="1300" baseline="30000" dirty="0">
-                <a:latin typeface="Calibri"/>
-                <a:ea typeface="Calibri"/>
-                <a:cs typeface="Calibri"/>
-                <a:sym typeface="Calibri"/>
-              </a:rPr>
-              <a:t>2</a:t>
-            </a:r>
-            <a:r>
-              <a:rPr lang="en-US" sz="1300" dirty="0">
-                <a:latin typeface="Calibri"/>
-                <a:ea typeface="Calibri"/>
-                <a:cs typeface="Calibri"/>
-                <a:sym typeface="Calibri"/>
-              </a:rPr>
-              <a:t> / (N/2) ] </a:t>
-            </a:r>
-          </a:p>
-          <a:p>
-            <a:pPr marL="0" lvl="0" indent="0" algn="l" rtl="0">
-              <a:spcBef>
-                <a:spcPts val="0"/>
-              </a:spcBef>
-              <a:spcAft>
-                <a:spcPts val="0"/>
-              </a:spcAft>
-              <a:buClr>
-                <a:schemeClr val="dk1"/>
-              </a:buClr>
-              <a:buSzPts val="1100"/>
-              <a:buFont typeface="Arial"/>
-              <a:buNone/>
-            </a:pPr>
-            <a:endParaRPr sz="1300" dirty="0">
-              <a:latin typeface="Calibri"/>
-              <a:ea typeface="Calibri"/>
-              <a:cs typeface="Calibri"/>
-              <a:sym typeface="Calibri"/>
-            </a:endParaRPr>
-          </a:p>
-          <a:p>
-            <a:pPr marL="0" lvl="0" indent="0" algn="l" rtl="0">
-              <a:spcBef>
-                <a:spcPts val="0"/>
-              </a:spcBef>
-              <a:spcAft>
-                <a:spcPts val="0"/>
-              </a:spcAft>
-              <a:buClr>
-                <a:schemeClr val="dk1"/>
-              </a:buClr>
-              <a:buSzPts val="1100"/>
-              <a:buFont typeface="Arial"/>
-              <a:buNone/>
-            </a:pPr>
-            <a:r>
-              <a:rPr lang="en-US" sz="1300" dirty="0">
-                <a:latin typeface="Calibri"/>
-                <a:ea typeface="Calibri"/>
-                <a:cs typeface="Calibri"/>
-                <a:sym typeface="Calibri"/>
-              </a:rPr>
-              <a:t>The P-value is the probability that a chi-square statistic having one degree of freedom is more extreme than that value.</a:t>
-            </a:r>
-          </a:p>
-          <a:p>
-            <a:pPr marL="0" lvl="0" indent="0" algn="l" rtl="0">
-              <a:spcBef>
-                <a:spcPts val="0"/>
-              </a:spcBef>
-              <a:spcAft>
-                <a:spcPts val="0"/>
-              </a:spcAft>
-              <a:buClr>
-                <a:schemeClr val="dk1"/>
-              </a:buClr>
-              <a:buSzPts val="1100"/>
-              <a:buFont typeface="Arial"/>
-              <a:buNone/>
-            </a:pPr>
-            <a:endParaRPr lang="en-US" sz="1300" dirty="0">
-              <a:latin typeface="Calibri"/>
-              <a:ea typeface="Calibri"/>
-              <a:cs typeface="Calibri"/>
-              <a:sym typeface="Calibri"/>
-            </a:endParaRPr>
-          </a:p>
-          <a:p>
-            <a:pPr marL="0" lvl="0" indent="0" algn="l" rtl="0">
-              <a:spcBef>
-                <a:spcPts val="0"/>
-              </a:spcBef>
-              <a:spcAft>
-                <a:spcPts val="0"/>
-              </a:spcAft>
-              <a:buClr>
-                <a:schemeClr val="dk1"/>
-              </a:buClr>
-              <a:buSzPts val="1100"/>
-              <a:buFont typeface="Arial"/>
-              <a:buNone/>
-            </a:pPr>
-            <a:r>
-              <a:rPr lang="en-US" sz="1300" dirty="0">
-                <a:latin typeface="Calibri"/>
-                <a:ea typeface="Calibri"/>
-                <a:cs typeface="Calibri"/>
-                <a:sym typeface="Calibri"/>
-              </a:rPr>
-              <a:t>Specific example: </a:t>
-            </a:r>
-          </a:p>
-          <a:p>
-            <a:pPr marL="0" lvl="0" indent="0" algn="l" rtl="0">
-              <a:spcBef>
-                <a:spcPts val="0"/>
-              </a:spcBef>
-              <a:spcAft>
-                <a:spcPts val="0"/>
-              </a:spcAft>
-              <a:buClr>
-                <a:schemeClr val="dk1"/>
-              </a:buClr>
-              <a:buSzPts val="1100"/>
-              <a:buFont typeface="Arial"/>
-              <a:buNone/>
-            </a:pPr>
-            <a:r>
-              <a:rPr lang="en-US" sz="1300" dirty="0">
-                <a:latin typeface="Calibri"/>
-                <a:ea typeface="Calibri"/>
-                <a:cs typeface="Calibri"/>
-                <a:sym typeface="Calibri"/>
-              </a:rPr>
-              <a:t>       N=100, H=60, T=40</a:t>
-            </a:r>
-          </a:p>
-          <a:p>
-            <a:pPr marL="0" lvl="0" indent="0" algn="l" rtl="0">
-              <a:spcBef>
-                <a:spcPts val="0"/>
-              </a:spcBef>
-              <a:spcAft>
-                <a:spcPts val="0"/>
-              </a:spcAft>
-              <a:buClr>
-                <a:schemeClr val="dk1"/>
-              </a:buClr>
-              <a:buSzPts val="1100"/>
-              <a:buFont typeface="Arial"/>
-              <a:buNone/>
-            </a:pPr>
-            <a:endParaRPr lang="en-US" sz="1300" dirty="0">
-              <a:latin typeface="Calibri"/>
-              <a:ea typeface="Calibri"/>
-              <a:cs typeface="Calibri"/>
-              <a:sym typeface="Calibri"/>
-            </a:endParaRPr>
-          </a:p>
-          <a:p>
-            <a:pPr>
-              <a:buClr>
-                <a:schemeClr val="dk1"/>
-              </a:buClr>
-              <a:buSzPts val="1100"/>
-            </a:pPr>
-            <a:r>
-              <a:rPr lang="en-US" sz="1300" dirty="0">
-                <a:latin typeface="Calibri"/>
-                <a:ea typeface="Calibri"/>
-                <a:cs typeface="Calibri"/>
-                <a:sym typeface="Calibri"/>
-              </a:rPr>
-              <a:t>X</a:t>
-            </a:r>
-            <a:r>
-              <a:rPr lang="en-US" sz="1300" baseline="30000" dirty="0">
-                <a:latin typeface="Calibri"/>
-                <a:ea typeface="Calibri"/>
-                <a:cs typeface="Calibri"/>
-                <a:sym typeface="Calibri"/>
-              </a:rPr>
-              <a:t>2</a:t>
-            </a:r>
-            <a:r>
-              <a:rPr lang="en-US" sz="1300" dirty="0">
-                <a:latin typeface="Calibri"/>
-                <a:ea typeface="Calibri"/>
-                <a:cs typeface="Calibri"/>
-                <a:sym typeface="Calibri"/>
-              </a:rPr>
-              <a:t> = [ (60– 50)</a:t>
-            </a:r>
-            <a:r>
-              <a:rPr lang="en-US" sz="1300" baseline="30000" dirty="0">
-                <a:latin typeface="Calibri"/>
-                <a:ea typeface="Calibri"/>
-                <a:cs typeface="Calibri"/>
-                <a:sym typeface="Calibri"/>
-              </a:rPr>
-              <a:t>2</a:t>
-            </a:r>
-            <a:r>
-              <a:rPr lang="en-US" sz="1300" dirty="0">
-                <a:latin typeface="Calibri"/>
-                <a:ea typeface="Calibri"/>
-                <a:cs typeface="Calibri"/>
-                <a:sym typeface="Calibri"/>
-              </a:rPr>
-              <a:t> / 50 ] + [ (40 – 50)</a:t>
-            </a:r>
-            <a:r>
-              <a:rPr lang="en-US" sz="1300" baseline="30000" dirty="0">
-                <a:latin typeface="Calibri"/>
-                <a:ea typeface="Calibri"/>
-                <a:cs typeface="Calibri"/>
-                <a:sym typeface="Calibri"/>
-              </a:rPr>
-              <a:t>2</a:t>
-            </a:r>
-            <a:r>
-              <a:rPr lang="en-US" sz="1300" dirty="0">
-                <a:latin typeface="Calibri"/>
-                <a:ea typeface="Calibri"/>
-                <a:cs typeface="Calibri"/>
-                <a:sym typeface="Calibri"/>
-              </a:rPr>
-              <a:t> / 50 ] = 10</a:t>
-            </a:r>
-            <a:r>
-              <a:rPr lang="en-US" sz="1300" baseline="30000" dirty="0">
-                <a:latin typeface="Calibri"/>
-                <a:ea typeface="Calibri"/>
-                <a:cs typeface="Calibri"/>
-                <a:sym typeface="Calibri"/>
-              </a:rPr>
-              <a:t>2</a:t>
-            </a:r>
-            <a:r>
-              <a:rPr lang="en-US" sz="1300" dirty="0">
-                <a:latin typeface="Calibri"/>
-                <a:ea typeface="Calibri"/>
-                <a:cs typeface="Calibri"/>
-                <a:sym typeface="Calibri"/>
-              </a:rPr>
-              <a:t> / 50  + 10</a:t>
-            </a:r>
-            <a:r>
-              <a:rPr lang="en-US" sz="1300" baseline="30000" dirty="0">
-                <a:latin typeface="Calibri"/>
-                <a:ea typeface="Calibri"/>
-                <a:cs typeface="Calibri"/>
-                <a:sym typeface="Calibri"/>
-              </a:rPr>
-              <a:t>2</a:t>
-            </a:r>
-            <a:r>
-              <a:rPr lang="en-US" sz="1300" dirty="0">
-                <a:latin typeface="Calibri"/>
-                <a:ea typeface="Calibri"/>
-                <a:cs typeface="Calibri"/>
-                <a:sym typeface="Calibri"/>
-              </a:rPr>
-              <a:t> / 50 = 2+2 = 4</a:t>
-            </a:r>
-          </a:p>
-          <a:p>
-            <a:pPr>
-              <a:buClr>
-                <a:schemeClr val="dk1"/>
-              </a:buClr>
-              <a:buSzPts val="1100"/>
-            </a:pPr>
-            <a:endParaRPr lang="en-US" sz="1300" dirty="0">
-              <a:latin typeface="Calibri"/>
-              <a:ea typeface="Calibri"/>
-              <a:cs typeface="Calibri"/>
-              <a:sym typeface="Calibri"/>
-            </a:endParaRPr>
-          </a:p>
-          <a:p>
-            <a:pPr>
-              <a:buClr>
-                <a:schemeClr val="dk1"/>
-              </a:buClr>
-              <a:buSzPts val="1100"/>
-            </a:pPr>
-            <a:r>
-              <a:rPr lang="en-US" sz="1300" dirty="0">
-                <a:latin typeface="Calibri"/>
-                <a:ea typeface="Calibri"/>
-                <a:cs typeface="Calibri"/>
-                <a:sym typeface="Calibri"/>
-              </a:rPr>
-              <a:t>X</a:t>
-            </a:r>
-            <a:r>
-              <a:rPr lang="en-US" sz="1300" baseline="30000" dirty="0">
-                <a:latin typeface="Calibri"/>
-                <a:ea typeface="Calibri"/>
-                <a:cs typeface="Calibri"/>
-                <a:sym typeface="Calibri"/>
-              </a:rPr>
-              <a:t>2</a:t>
-            </a:r>
-            <a:r>
-              <a:rPr lang="en-US" sz="1300" dirty="0">
-                <a:latin typeface="Calibri"/>
-                <a:ea typeface="Calibri"/>
-                <a:cs typeface="Calibri"/>
-                <a:sym typeface="Calibri"/>
-              </a:rPr>
-              <a:t> distribution for 1 degree of freedom gives 3.84 for P-value P=0.05.</a:t>
-            </a:r>
-          </a:p>
-          <a:p>
-            <a:pPr>
-              <a:buClr>
-                <a:schemeClr val="dk1"/>
-              </a:buClr>
-              <a:buSzPts val="1100"/>
-            </a:pPr>
-            <a:r>
-              <a:rPr lang="en-US" sz="1300" dirty="0">
-                <a:latin typeface="Calibri"/>
-                <a:ea typeface="Calibri"/>
-                <a:cs typeface="Calibri"/>
-                <a:sym typeface="Calibri"/>
-              </a:rPr>
-              <a:t>We have 4, which is more extreme. </a:t>
-            </a:r>
-          </a:p>
-          <a:p>
-            <a:pPr>
-              <a:buClr>
-                <a:schemeClr val="dk1"/>
-              </a:buClr>
-              <a:buSzPts val="1100"/>
-            </a:pPr>
-            <a:r>
-              <a:rPr lang="en-US" sz="1300" dirty="0">
-                <a:latin typeface="Calibri"/>
-                <a:ea typeface="Calibri"/>
-                <a:cs typeface="Calibri"/>
-                <a:sym typeface="Calibri"/>
-              </a:rPr>
-              <a:t>So we reject the null hypothesis (that the coin is fair).</a:t>
-            </a:r>
-          </a:p>
-          <a:p>
-            <a:pPr>
-              <a:buClr>
-                <a:schemeClr val="dk1"/>
-              </a:buClr>
-              <a:buSzPts val="1100"/>
-            </a:pPr>
-            <a:endParaRPr lang="en-US" sz="1300" dirty="0">
-              <a:latin typeface="Calibri"/>
-              <a:ea typeface="Calibri"/>
-              <a:cs typeface="Calibri"/>
-              <a:sym typeface="Calibri"/>
-            </a:endParaRPr>
-          </a:p>
-          <a:p>
-            <a:pPr>
-              <a:buClr>
-                <a:schemeClr val="dk1"/>
-              </a:buClr>
-              <a:buSzPts val="1100"/>
-            </a:pPr>
-            <a:endParaRPr lang="en-US" sz="1300" dirty="0">
-              <a:latin typeface="Calibri"/>
-              <a:ea typeface="Calibri"/>
-              <a:cs typeface="Calibri"/>
-              <a:sym typeface="Calibri"/>
-            </a:endParaRPr>
-          </a:p>
-        </p:txBody>
-      </p:sp>
-      <p:pic>
-        <p:nvPicPr>
-          <p:cNvPr id="5" name="Picture 4">
-            <a:extLst>
-              <a:ext uri="{FF2B5EF4-FFF2-40B4-BE49-F238E27FC236}">
-                <a16:creationId xmlns:a16="http://schemas.microsoft.com/office/drawing/2014/main" id="{FC02FCE1-51F8-CF47-AD22-F756CF53965A}"/>
-              </a:ext>
-            </a:extLst>
-          </p:cNvPr>
-          <p:cNvPicPr>
-            <a:picLocks noChangeAspect="1"/>
-          </p:cNvPicPr>
-          <p:nvPr/>
-        </p:nvPicPr>
-        <p:blipFill rotWithShape="1">
-          <a:blip r:embed="rId2" cstate="email">
-            <a:extLst>
-              <a:ext uri="{28A0092B-C50C-407E-A947-70E740481C1C}">
-                <a14:useLocalDpi xmlns:a14="http://schemas.microsoft.com/office/drawing/2010/main"/>
-              </a:ext>
-            </a:extLst>
-          </a:blip>
-          <a:srcRect/>
-          <a:stretch/>
-        </p:blipFill>
-        <p:spPr>
-          <a:xfrm>
-            <a:off x="7556584" y="662608"/>
-            <a:ext cx="4049486" cy="3180523"/>
-          </a:xfrm>
-          <a:prstGeom prst="rect">
-            <a:avLst/>
-          </a:prstGeom>
-        </p:spPr>
-      </p:pic>
-      <p:sp>
-        <p:nvSpPr>
-          <p:cNvPr id="6" name="TextBox 5">
-            <a:extLst>
-              <a:ext uri="{FF2B5EF4-FFF2-40B4-BE49-F238E27FC236}">
-                <a16:creationId xmlns:a16="http://schemas.microsoft.com/office/drawing/2014/main" id="{F9CD06EB-7D73-6747-8B8D-655F4F207CAE}"/>
-              </a:ext>
-            </a:extLst>
-          </p:cNvPr>
-          <p:cNvSpPr txBox="1"/>
-          <p:nvPr/>
-        </p:nvSpPr>
-        <p:spPr>
-          <a:xfrm>
-            <a:off x="10486259" y="755596"/>
-            <a:ext cx="808383" cy="707886"/>
-          </a:xfrm>
-          <a:prstGeom prst="rect">
-            <a:avLst/>
-          </a:prstGeom>
-          <a:noFill/>
-        </p:spPr>
-        <p:txBody>
-          <a:bodyPr wrap="square" rtlCol="0">
-            <a:spAutoFit/>
-          </a:bodyPr>
-          <a:lstStyle/>
-          <a:p>
-            <a:r>
-              <a:rPr lang="en-US" sz="4000" b="1" i="1" dirty="0">
-                <a:solidFill>
-                  <a:srgbClr val="222222"/>
-                </a:solidFill>
-                <a:highlight>
-                  <a:srgbClr val="FFFFFF"/>
-                </a:highlight>
-                <a:latin typeface="Times New Roman"/>
-                <a:ea typeface="Times New Roman"/>
-                <a:cs typeface="Times New Roman"/>
-                <a:sym typeface="Times New Roman"/>
-              </a:rPr>
-              <a:t>χ</a:t>
-            </a:r>
-            <a:r>
-              <a:rPr lang="en-US" sz="4000" b="1" baseline="30000" dirty="0">
-                <a:solidFill>
-                  <a:srgbClr val="222222"/>
-                </a:solidFill>
-                <a:highlight>
-                  <a:srgbClr val="FFFFFF"/>
-                </a:highlight>
-                <a:latin typeface="Times New Roman"/>
-                <a:ea typeface="Times New Roman"/>
-                <a:cs typeface="Times New Roman"/>
-                <a:sym typeface="Times New Roman"/>
-              </a:rPr>
-              <a:t>2</a:t>
-            </a:r>
-            <a:endParaRPr lang="en-US" sz="4000" dirty="0"/>
-          </a:p>
-        </p:txBody>
-      </p:sp>
-      <p:sp>
-        <p:nvSpPr>
-          <p:cNvPr id="7" name="Oval 6">
-            <a:extLst>
-              <a:ext uri="{FF2B5EF4-FFF2-40B4-BE49-F238E27FC236}">
-                <a16:creationId xmlns:a16="http://schemas.microsoft.com/office/drawing/2014/main" id="{A138FD90-7D86-7947-B9C9-3970A771F11A}"/>
-              </a:ext>
-            </a:extLst>
-          </p:cNvPr>
-          <p:cNvSpPr/>
-          <p:nvPr/>
-        </p:nvSpPr>
-        <p:spPr>
-          <a:xfrm>
-            <a:off x="10137913" y="662608"/>
-            <a:ext cx="1169981" cy="980661"/>
-          </a:xfrm>
-          <a:prstGeom prst="ellipse">
-            <a:avLst/>
-          </a:prstGeom>
-          <a:noFill/>
-        </p:spPr>
-        <p:style>
-          <a:lnRef idx="2">
-            <a:schemeClr val="accent1">
-              <a:shade val="50000"/>
-            </a:schemeClr>
-          </a:lnRef>
-          <a:fillRef idx="1">
-            <a:schemeClr val="accent1"/>
-          </a:fillRef>
-          <a:effectRef idx="0">
-            <a:schemeClr val="accent1"/>
-          </a:effectRef>
-          <a:fontRef idx="minor">
-            <a:schemeClr val="lt1"/>
-          </a:fontRef>
-        </p:style>
-        <p:txBody>
-          <a:bodyPr rtlCol="0" anchor="ctr"/>
-          <a:lstStyle/>
-          <a:p>
-            <a:pPr algn="ctr"/>
-            <a:endParaRPr lang="en-US"/>
-          </a:p>
-        </p:txBody>
-      </p:sp>
-      <p:pic>
-        <p:nvPicPr>
-          <p:cNvPr id="8" name="Picture 7">
-            <a:extLst>
-              <a:ext uri="{FF2B5EF4-FFF2-40B4-BE49-F238E27FC236}">
-                <a16:creationId xmlns:a16="http://schemas.microsoft.com/office/drawing/2014/main" id="{9A25444D-FF1F-1B4F-9E2D-91F9E45E1FC7}"/>
-              </a:ext>
-            </a:extLst>
-          </p:cNvPr>
-          <p:cNvPicPr>
-            <a:picLocks noChangeAspect="1"/>
-          </p:cNvPicPr>
-          <p:nvPr/>
-        </p:nvPicPr>
-        <p:blipFill>
-          <a:blip r:embed="rId3" cstate="email">
-            <a:extLst>
-              <a:ext uri="{28A0092B-C50C-407E-A947-70E740481C1C}">
-                <a14:useLocalDpi xmlns:a14="http://schemas.microsoft.com/office/drawing/2010/main"/>
-              </a:ext>
-            </a:extLst>
-          </a:blip>
-          <a:stretch>
-            <a:fillRect/>
-          </a:stretch>
-        </p:blipFill>
-        <p:spPr>
-          <a:xfrm>
-            <a:off x="8106703" y="4865204"/>
-            <a:ext cx="2616200" cy="838200"/>
-          </a:xfrm>
-          <a:prstGeom prst="rect">
-            <a:avLst/>
-          </a:prstGeom>
-        </p:spPr>
-      </p:pic>
-    </p:spTree>
-    <p:extLst>
-      <p:ext uri="{BB962C8B-B14F-4D97-AF65-F5344CB8AC3E}">
-        <p14:creationId xmlns:p14="http://schemas.microsoft.com/office/powerpoint/2010/main" val="364448510"/>
       </p:ext>
     </p:extLst>
   </p:cSld>
